--- a/Topic_C/Exam_Practice/TC-L02_Speaking_Workshop_Landscapes_Nature_Animals.pptx
+++ b/Topic_C/Exam_Practice/TC-L02_Speaking_Workshop_Landscapes_Nature_Animals.pptx
@@ -615,7 +615,11 @@
           <a:lstStyle/>
           <a:p>
             <a:r>
-              <a:rPr lang="en-US" dirty="0"/>
+              <a:rPr lang="ar-SA" dirty="0">
+                <a:latin typeface="Amiri" pitchFamily="2" charset="-78"/>
+                <a:ea typeface="Amiri" pitchFamily="2" charset="-78"/>
+                <a:cs typeface="Amiri" pitchFamily="2" charset="-78"/>
+              </a:rPr>
               <a:t>ROLE PLAY C (Develop) — a nature photo.
 SET-UP IN THE BREAKOUT ROOM: A = examiner (reads the left column ONLY — the questions, in order), B = candidate (sees the task column; Core may use the help column), C = observer (ticks the feedback checklist). 1 minute preparation, about 3 minutes speaking, 1 minute feedback, then rotate.
 Task ! is the unexpected question: in the exam the candidate has not seen it — the examiner should read it without warning.
@@ -707,7 +711,11 @@
           <a:lstStyle/>
           <a:p>
             <a:r>
-              <a:rPr lang="en-US" dirty="0"/>
+              <a:rPr lang="ar-SA" dirty="0">
+                <a:latin typeface="Amiri" pitchFamily="2" charset="-78"/>
+                <a:ea typeface="Amiri" pitchFamily="2" charset="-78"/>
+                <a:cs typeface="Amiri" pitchFamily="2" charset="-78"/>
+              </a:rPr>
               <a:t>ROLE PLAY D (Stretch) — a wildlife documentary interview.
 SET-UP IN THE BREAKOUT ROOM: A = examiner (reads the left column ONLY — the questions, in order), B = candidate (sees the task column; Core may use the help column), C = observer (ticks the feedback checklist). 1 minute preparation, about 3 minutes speaking, 1 minute feedback, then rotate.
 Task ! is the unexpected question: in the exam the candidate has not seen it — the examiner should read it without warning.
@@ -1243,7 +1251,11 @@
           <a:lstStyle/>
           <a:p>
             <a:r>
-              <a:rPr lang="en-US" dirty="0"/>
+              <a:rPr lang="ar-SA" dirty="0">
+                <a:latin typeface="Amiri" pitchFamily="2" charset="-78"/>
+                <a:ea typeface="Amiri" pitchFamily="2" charset="-78"/>
+                <a:cs typeface="Amiri" pitchFamily="2" charset="-78"/>
+              </a:rPr>
               <a:t>TOPIC CONVERSATION — Core. Examiner asks the questions in order and may add “لِمَاذَا؟ / هَلْ يُمْكِنُ أَنْ تَشْرَحَ أَكْثَرَ؟” to push for more. Candidate aims for one full sentence per question.
 </a:t>
             </a:r>
@@ -1332,7 +1344,11 @@
           <a:lstStyle/>
           <a:p>
             <a:r>
-              <a:rPr lang="en-US" dirty="0"/>
+              <a:rPr lang="ar-SA" dirty="0">
+                <a:latin typeface="Amiri" pitchFamily="2" charset="-78"/>
+                <a:ea typeface="Amiri" pitchFamily="2" charset="-78"/>
+                <a:cs typeface="Amiri" pitchFamily="2" charset="-78"/>
+              </a:rPr>
               <a:t>TOPIC CONVERSATION — Develop. Examiner asks the questions in order and may add “لِمَاذَا؟ / هَلْ يُمْكِنُ أَنْ تَشْرَحَ أَكْثَرَ؟” to push for more. Candidate aims for two or three sentences, with description and a past detail.
 </a:t>
             </a:r>
@@ -1421,7 +1437,11 @@
           <a:lstStyle/>
           <a:p>
             <a:r>
-              <a:rPr lang="en-US" dirty="0"/>
+              <a:rPr lang="ar-SA" dirty="0">
+                <a:latin typeface="Amiri" pitchFamily="2" charset="-78"/>
+                <a:ea typeface="Amiri" pitchFamily="2" charset="-78"/>
+                <a:cs typeface="Amiri" pitchFamily="2" charset="-78"/>
+              </a:rPr>
               <a:t>TOPIC CONVERSATION — Stretch. Examiner asks the questions in order and may add “لِمَاذَا؟ / هَلْ يُمْكِنُ أَنْ تَشْرَحَ أَكْثَرَ؟” to push for more. Candidate aims for a developed answer: opinion, comparison, concession and a conditional.
 </a:t>
             </a:r>
@@ -1510,7 +1530,11 @@
           <a:lstStyle/>
           <a:p>
             <a:r>
-              <a:rPr lang="en-US" dirty="0"/>
+              <a:rPr lang="ar-SA" dirty="0">
+                <a:latin typeface="Amiri" pitchFamily="2" charset="-78"/>
+                <a:ea typeface="Amiri" pitchFamily="2" charset="-78"/>
+                <a:cs typeface="Amiri" pitchFamily="2" charset="-78"/>
+              </a:rPr>
               <a:t>WELCOME (1 min) — while students join.
 • Greet each student by name as they arrive: السَّلَامُ عَلَيْكُمْ. Take the register (Pastoral Tracker: attendance 0/1).
 • 2-MINUTE CHECK-IN (SEND training): a private chat to any student who seemed unsettled last lesson — “Are you okay today? 👍 / 👎”.
@@ -2224,7 +2248,11 @@
           <a:lstStyle/>
           <a:p>
             <a:r>
-              <a:rPr lang="en-US" dirty="0"/>
+              <a:rPr lang="ar-SA" dirty="0">
+                <a:latin typeface="Amiri" pitchFamily="2" charset="-78"/>
+                <a:ea typeface="Amiri" pitchFamily="2" charset="-78"/>
+                <a:cs typeface="Amiri" pitchFamily="2" charset="-78"/>
+              </a:rPr>
               <a:t>TEACH (3 min). Role play = precise and complete; conversation = develop. Choral repetition of the repair phrases. To a girl: تُعِيدِي.</a:t>
             </a:r>
             <a:endParaRPr lang="en-US" dirty="0"/>
@@ -2312,7 +2340,11 @@
           <a:lstStyle/>
           <a:p>
             <a:r>
-              <a:rPr lang="en-US" dirty="0"/>
+              <a:rPr lang="ar-SA" dirty="0">
+                <a:latin typeface="Amiri" pitchFamily="2" charset="-78"/>
+                <a:ea typeface="Amiri" pitchFamily="2" charset="-78"/>
+                <a:cs typeface="Amiri" pitchFamily="2" charset="-78"/>
+              </a:rPr>
               <a:t>LANGUAGE BANK (2 min) — non-human plurals take the feminine singular: جِبَالٌ عَالِيَةٌ · غَابَاتٌ كَثِيفَةٌ. صَحْرَاءُ is feminine and has no tanwīn. وَادٍ → الوَادِي (al- restores the yāʾ).</a:t>
             </a:r>
             <a:endParaRPr lang="en-US" dirty="0"/>
@@ -2400,7 +2432,11 @@
           <a:lstStyle/>
           <a:p>
             <a:r>
-              <a:rPr lang="en-US" dirty="0"/>
+              <a:rPr lang="ar-SA" dirty="0">
+                <a:latin typeface="Amiri" pitchFamily="2" charset="-78"/>
+                <a:ea typeface="Amiri" pitchFamily="2" charset="-78"/>
+                <a:cs typeface="Amiri" pitchFamily="2" charset="-78"/>
+              </a:rPr>
               <a:t>LANGUAGE BANK (2 min) — the verb agrees too: يَعِيشُ الجَمَلُ فِي الصَّحْرَاءِ · تَعِيشُ الطُّيُورُ فِي الغَابَةِ (non-human pl. → f. sg.). Relative: الحَيَوَانَاتُ الَّتِي تَعِيشُ فِي القُطْبِ.</a:t>
             </a:r>
             <a:endParaRPr lang="en-US" dirty="0"/>
@@ -2576,7 +2612,11 @@
           <a:lstStyle/>
           <a:p>
             <a:r>
-              <a:rPr lang="en-US" dirty="0"/>
+              <a:rPr lang="ar-SA" dirty="0">
+                <a:latin typeface="Amiri" pitchFamily="2" charset="-78"/>
+                <a:ea typeface="Amiri" pitchFamily="2" charset="-78"/>
+                <a:cs typeface="Amiri" pitchFamily="2" charset="-78"/>
+              </a:rPr>
               <a:t>ROLE PLAY A (Core) — a national park.
 SET-UP IN THE BREAKOUT ROOM: A = examiner (reads the left column ONLY — the questions, in order), B = candidate (sees the task column; Core may use the help column), C = observer (ticks the feedback checklist). 1 minute preparation, about 3 minutes speaking, 1 minute feedback, then rotate.
 Task ! is the unexpected question: in the exam the candidate has not seen it — the examiner should read it without warning.
@@ -2668,7 +2708,11 @@
           <a:lstStyle/>
           <a:p>
             <a:r>
-              <a:rPr lang="en-US" dirty="0"/>
+              <a:rPr lang="ar-SA" dirty="0">
+                <a:latin typeface="Amiri" pitchFamily="2" charset="-78"/>
+                <a:ea typeface="Amiri" pitchFamily="2" charset="-78"/>
+                <a:cs typeface="Amiri" pitchFamily="2" charset="-78"/>
+              </a:rPr>
               <a:t>ROLE PLAY B (Core+) — choosing a trip.
 SET-UP IN THE BREAKOUT ROOM: A = examiner (reads the left column ONLY — the questions, in order), B = candidate (sees the task column; Core may use the help column), C = observer (ticks the feedback checklist). 1 minute preparation, about 3 minutes speaking, 1 minute feedback, then rotate.
 Task ! is the unexpected question: in the exam the candidate has not seen it — the examiner should read it without warning.
@@ -3156,6 +3200,7 @@
                   <a:srgbClr val="D4AF37"/>
                 </a:solidFill>
                 <a:latin typeface="Amiri" pitchFamily="2" charset="-78"/>
+                <a:ea typeface="Amiri" pitchFamily="2" charset="-78"/>
                 <a:cs typeface="Amiri" pitchFamily="2" charset="-78"/>
               </a:rPr>
               <a:t>م</a:t>
@@ -3362,6 +3407,7 @@
                   <a:srgbClr val="D4AF37"/>
                 </a:solidFill>
                 <a:latin typeface="Amiri" pitchFamily="2" charset="-78"/>
+                <a:ea typeface="Amiri" pitchFamily="2" charset="-78"/>
                 <a:cs typeface="Amiri" pitchFamily="2" charset="-78"/>
               </a:rPr>
               <a:t>وَرْشَةُ التَّحَدُّثِ — الطَّبِيعَةُ وَالحَيَوَانَاتُ</a:t>
@@ -3819,6 +3865,7 @@
                   <a:srgbClr val="D4AF37"/>
                 </a:solidFill>
                 <a:latin typeface="Amiri" pitchFamily="2" charset="-78"/>
+                <a:ea typeface="Amiri" pitchFamily="2" charset="-78"/>
                 <a:cs typeface="Amiri" pitchFamily="2" charset="-78"/>
               </a:rPr>
               <a:t>م</a:t>
@@ -4139,6 +4186,7 @@
                   <a:srgbClr val="8A6D1E"/>
                 </a:solidFill>
                 <a:latin typeface="Amiri" pitchFamily="2" charset="-78"/>
+                <a:ea typeface="Amiri" pitchFamily="2" charset="-78"/>
                 <a:cs typeface="Amiri" pitchFamily="2" charset="-78"/>
               </a:rPr>
               <a:t>صُورَةٌ مِنَ الطَّبِيعَةِ</a:t>
@@ -4419,6 +4467,7 @@
                   <a:srgbClr val="1B3B6F"/>
                 </a:solidFill>
                 <a:latin typeface="Amiri" pitchFamily="2" charset="-78"/>
+                <a:ea typeface="Amiri" pitchFamily="2" charset="-78"/>
                 <a:cs typeface="Amiri" pitchFamily="2" charset="-78"/>
               </a:rPr>
               <a:t>أَخَذْتُهَا فِي … عِنْدَمَا …</a:t>
@@ -4495,6 +4544,7 @@
                   <a:srgbClr val="1B3B6F"/>
                 </a:solidFill>
                 <a:latin typeface="Amiri" pitchFamily="2" charset="-78"/>
+                <a:ea typeface="Amiri" pitchFamily="2" charset="-78"/>
                 <a:cs typeface="Amiri" pitchFamily="2" charset="-78"/>
               </a:rPr>
               <a:t>أَيْنَ أَخَذْتَ هٰذِهِ الصُّورَةَ؟</a:t>
@@ -4598,6 +4648,7 @@
                   <a:srgbClr val="1B3B6F"/>
                 </a:solidFill>
                 <a:latin typeface="Amiri" pitchFamily="2" charset="-78"/>
+                <a:ea typeface="Amiri" pitchFamily="2" charset="-78"/>
                 <a:cs typeface="Amiri" pitchFamily="2" charset="-78"/>
               </a:rPr>
               <a:t>فِي الصُّورَةِ … وَ… وَ…</a:t>
@@ -4674,6 +4725,7 @@
                   <a:srgbClr val="1B3B6F"/>
                 </a:solidFill>
                 <a:latin typeface="Amiri" pitchFamily="2" charset="-78"/>
+                <a:ea typeface="Amiri" pitchFamily="2" charset="-78"/>
                 <a:cs typeface="Amiri" pitchFamily="2" charset="-78"/>
               </a:rPr>
               <a:t>صِفْ مَا نَرَاهُ فِيهَا.</a:t>
@@ -4777,6 +4829,7 @@
                   <a:srgbClr val="1B3B6F"/>
                 </a:solidFill>
                 <a:latin typeface="Amiri" pitchFamily="2" charset="-78"/>
+                <a:ea typeface="Amiri" pitchFamily="2" charset="-78"/>
                 <a:cs typeface="Amiri" pitchFamily="2" charset="-78"/>
               </a:rPr>
               <a:t>نَعَمْ، … الَّذِي / الَّتِي …</a:t>
@@ -4853,6 +4906,7 @@
                   <a:srgbClr val="1B3B6F"/>
                 </a:solidFill>
                 <a:latin typeface="Amiri" pitchFamily="2" charset="-78"/>
+                <a:ea typeface="Amiri" pitchFamily="2" charset="-78"/>
                 <a:cs typeface="Amiri" pitchFamily="2" charset="-78"/>
               </a:rPr>
               <a:t>وَهَلْ تُوجَدُ حَيَوَانَاتٌ؟</a:t>
@@ -4956,6 +5010,7 @@
                   <a:srgbClr val="1B3B6F"/>
                 </a:solidFill>
                 <a:latin typeface="Amiri" pitchFamily="2" charset="-78"/>
+                <a:ea typeface="Amiri" pitchFamily="2" charset="-78"/>
                 <a:cs typeface="Amiri" pitchFamily="2" charset="-78"/>
               </a:rPr>
               <a:t>لِأَنَّ … وَلِأَنَّ …</a:t>
@@ -5032,6 +5087,7 @@
                   <a:srgbClr val="1B3B6F"/>
                 </a:solidFill>
                 <a:latin typeface="Amiri" pitchFamily="2" charset="-78"/>
+                <a:ea typeface="Amiri" pitchFamily="2" charset="-78"/>
                 <a:cs typeface="Amiri" pitchFamily="2" charset="-78"/>
               </a:rPr>
               <a:t>لِمَاذَا اخْتَرْتَ هٰذِهِ الصُّورَةَ لِلْمُسَابَقَةِ؟</a:t>
@@ -5135,6 +5191,7 @@
                   <a:srgbClr val="1B3B6F"/>
                 </a:solidFill>
                 <a:latin typeface="Amiri" pitchFamily="2" charset="-78"/>
+                <a:ea typeface="Amiri" pitchFamily="2" charset="-78"/>
                 <a:cs typeface="Amiri" pitchFamily="2" charset="-78"/>
               </a:rPr>
               <a:t>سَأُصَوِّرُ … لِأَنَّ …</a:t>
@@ -5211,6 +5268,7 @@
                   <a:srgbClr val="1B3B6F"/>
                 </a:solidFill>
                 <a:latin typeface="Amiri" pitchFamily="2" charset="-78"/>
+                <a:ea typeface="Amiri" pitchFamily="2" charset="-78"/>
                 <a:cs typeface="Amiri" pitchFamily="2" charset="-78"/>
               </a:rPr>
               <a:t>أَيْنَ سَتُصَوِّرُ فِي المَرَّةِ القَادِمَةِ؟</a:t>
@@ -5420,6 +5478,7 @@
                   <a:srgbClr val="D4AF37"/>
                 </a:solidFill>
                 <a:latin typeface="Amiri" pitchFamily="2" charset="-78"/>
+                <a:ea typeface="Amiri" pitchFamily="2" charset="-78"/>
                 <a:cs typeface="Amiri" pitchFamily="2" charset="-78"/>
               </a:rPr>
               <a:t>م</a:t>
@@ -5740,6 +5799,7 @@
                   <a:srgbClr val="8A6D1E"/>
                 </a:solidFill>
                 <a:latin typeface="Amiri" pitchFamily="2" charset="-78"/>
+                <a:ea typeface="Amiri" pitchFamily="2" charset="-78"/>
                 <a:cs typeface="Amiri" pitchFamily="2" charset="-78"/>
               </a:rPr>
               <a:t>حِمَايَةُ الحَيَاةِ البَرِّيَّةِ</a:t>
@@ -6020,6 +6080,7 @@
                   <a:srgbClr val="1B3B6F"/>
                 </a:solidFill>
                 <a:latin typeface="Amiri" pitchFamily="2" charset="-78"/>
+                <a:ea typeface="Amiri" pitchFamily="2" charset="-78"/>
                 <a:cs typeface="Amiri" pitchFamily="2" charset="-78"/>
               </a:rPr>
               <a:t>لِأَنَّ … فَمَثَلًا …</a:t>
@@ -6096,6 +6157,7 @@
                   <a:srgbClr val="1B3B6F"/>
                 </a:solidFill>
                 <a:latin typeface="Amiri" pitchFamily="2" charset="-78"/>
+                <a:ea typeface="Amiri" pitchFamily="2" charset="-78"/>
                 <a:cs typeface="Amiri" pitchFamily="2" charset="-78"/>
               </a:rPr>
               <a:t>لِمَاذَا تَتَطَوَّعُ لِحِمَايَةِ الحَيَوَانَاتِ؟</a:t>
@@ -6199,6 +6261,7 @@
                   <a:srgbClr val="1B3B6F"/>
                 </a:solidFill>
                 <a:latin typeface="Amiri" pitchFamily="2" charset="-78"/>
+                <a:ea typeface="Amiri" pitchFamily="2" charset="-78"/>
                 <a:cs typeface="Amiri" pitchFamily="2" charset="-78"/>
               </a:rPr>
               <a:t>كَانَتِ الغَابَاتُ … أَمَّا اليَوْمَ فَتَحَوَّلَ …</a:t>
@@ -6275,6 +6338,7 @@
                   <a:srgbClr val="1B3B6F"/>
                 </a:solidFill>
                 <a:latin typeface="Amiri" pitchFamily="2" charset="-78"/>
+                <a:ea typeface="Amiri" pitchFamily="2" charset="-78"/>
                 <a:cs typeface="Amiri" pitchFamily="2" charset="-78"/>
               </a:rPr>
               <a:t>كَيْفَ كَانَتِ الطَّبِيعَةُ فِي المَاضِي؟</a:t>
@@ -6378,6 +6442,7 @@
                   <a:srgbClr val="1B3B6F"/>
                 </a:solidFill>
                 <a:latin typeface="Amiri" pitchFamily="2" charset="-78"/>
+                <a:ea typeface="Amiri" pitchFamily="2" charset="-78"/>
                 <a:cs typeface="Amiri" pitchFamily="2" charset="-78"/>
               </a:rPr>
               <a:t>نَظَّفْنَا … فَعَادَتْ …</a:t>
@@ -6454,6 +6519,7 @@
                   <a:srgbClr val="1B3B6F"/>
                 </a:solidFill>
                 <a:latin typeface="Amiri" pitchFamily="2" charset="-78"/>
+                <a:ea typeface="Amiri" pitchFamily="2" charset="-78"/>
                 <a:cs typeface="Amiri" pitchFamily="2" charset="-78"/>
               </a:rPr>
               <a:t>مَاذَا فَعَلْتُمْ فِي مَجْمُوعَتِكُمْ؟</a:t>
@@ -6557,6 +6623,7 @@
                   <a:srgbClr val="1B3B6F"/>
                 </a:solidFill>
                 <a:latin typeface="Amiri" pitchFamily="2" charset="-78"/>
+                <a:ea typeface="Amiri" pitchFamily="2" charset="-78"/>
                 <a:cs typeface="Amiri" pitchFamily="2" charset="-78"/>
               </a:rPr>
               <a:t>صَحِيحٌ أَنَّ … غَيْرَ أَنَّ …</a:t>
@@ -6633,6 +6700,7 @@
                   <a:srgbClr val="1B3B6F"/>
                 </a:solidFill>
                 <a:latin typeface="Amiri" pitchFamily="2" charset="-78"/>
+                <a:ea typeface="Amiri" pitchFamily="2" charset="-78"/>
                 <a:cs typeface="Amiri" pitchFamily="2" charset="-78"/>
               </a:rPr>
               <a:t>أَلَيْسَ النَّاسُ أَهَمَّ مِنَ الحَيَوَانَاتِ؟</a:t>
@@ -6736,6 +6804,7 @@
                   <a:srgbClr val="1B3B6F"/>
                 </a:solidFill>
                 <a:latin typeface="Amiri" pitchFamily="2" charset="-78"/>
+                <a:ea typeface="Amiri" pitchFamily="2" charset="-78"/>
                 <a:cs typeface="Amiri" pitchFamily="2" charset="-78"/>
               </a:rPr>
               <a:t>لَوْ كُنْتُ حَيَوَانًا، لَكُنْتُ … لِأَنَّ …</a:t>
@@ -6812,6 +6881,7 @@
                   <a:srgbClr val="1B3B6F"/>
                 </a:solidFill>
                 <a:latin typeface="Amiri" pitchFamily="2" charset="-78"/>
+                <a:ea typeface="Amiri" pitchFamily="2" charset="-78"/>
                 <a:cs typeface="Amiri" pitchFamily="2" charset="-78"/>
               </a:rPr>
               <a:t>لَوْ كُنْتَ حَيَوَانًا، أَيَّ حَيَوَانٍ تَكُونُ؟</a:t>
@@ -7021,6 +7091,7 @@
                   <a:srgbClr val="D4AF37"/>
                 </a:solidFill>
                 <a:latin typeface="Amiri" pitchFamily="2" charset="-78"/>
+                <a:ea typeface="Amiri" pitchFamily="2" charset="-78"/>
                 <a:cs typeface="Amiri" pitchFamily="2" charset="-78"/>
               </a:rPr>
               <a:t>م</a:t>
@@ -7341,6 +7412,7 @@
                   <a:srgbClr val="8A6D1E"/>
                 </a:solidFill>
                 <a:latin typeface="Amiri" pitchFamily="2" charset="-78"/>
+                <a:ea typeface="Amiri" pitchFamily="2" charset="-78"/>
                 <a:cs typeface="Amiri" pitchFamily="2" charset="-78"/>
               </a:rPr>
               <a:t>وَرَقَةُ المُلَاحِظِ</a:t>
@@ -8811,6 +8883,7 @@
                   <a:srgbClr val="D4AF37"/>
                 </a:solidFill>
                 <a:latin typeface="Amiri" pitchFamily="2" charset="-78"/>
+                <a:ea typeface="Amiri" pitchFamily="2" charset="-78"/>
                 <a:cs typeface="Amiri" pitchFamily="2" charset="-78"/>
               </a:rPr>
               <a:t>م</a:t>
@@ -9131,6 +9204,7 @@
                   <a:srgbClr val="8A6D1E"/>
                 </a:solidFill>
                 <a:latin typeface="Amiri" pitchFamily="2" charset="-78"/>
+                <a:ea typeface="Amiri" pitchFamily="2" charset="-78"/>
                 <a:cs typeface="Amiri" pitchFamily="2" charset="-78"/>
               </a:rPr>
               <a:t>نَمُوذَجُ الإِجَابَةِ</a:t>
@@ -9373,6 +9447,7 @@
                   <a:srgbClr val="1B3B6F"/>
                 </a:solidFill>
                 <a:latin typeface="Amiri" pitchFamily="2" charset="-78"/>
+                <a:ea typeface="Amiri" pitchFamily="2" charset="-78"/>
                 <a:cs typeface="Amiri" pitchFamily="2" charset="-78"/>
               </a:rPr>
               <a:t>أُرِيدُ أَنْ أَرَى الجِبَالَ وَالبُحَيْرَةَ الكَبِيرَةَ.</a:t>
@@ -9449,6 +9524,7 @@
                   <a:srgbClr val="1B3B6F"/>
                 </a:solidFill>
                 <a:latin typeface="Amiri" pitchFamily="2" charset="-78"/>
+                <a:ea typeface="Amiri" pitchFamily="2" charset="-78"/>
                 <a:cs typeface="Amiri" pitchFamily="2" charset="-78"/>
               </a:rPr>
               <a:t>أَهْلًا! مَاذَا تُرِيدُ أَنْ تَرَى؟</a:t>
@@ -9552,6 +9628,7 @@
                   <a:srgbClr val="1B3B6F"/>
                 </a:solidFill>
                 <a:latin typeface="Amiri" pitchFamily="2" charset="-78"/>
+                <a:ea typeface="Amiri" pitchFamily="2" charset="-78"/>
                 <a:cs typeface="Amiri" pitchFamily="2" charset="-78"/>
               </a:rPr>
               <a:t>نَعَمْ، أُحِبُّ الجِبَالَ لِأَنَّهَا عَالِيَةٌ وَجَمِيلَةٌ.</a:t>
@@ -9628,6 +9705,7 @@
                   <a:srgbClr val="1B3B6F"/>
                 </a:solidFill>
                 <a:latin typeface="Amiri" pitchFamily="2" charset="-78"/>
+                <a:ea typeface="Amiri" pitchFamily="2" charset="-78"/>
                 <a:cs typeface="Amiri" pitchFamily="2" charset="-78"/>
               </a:rPr>
               <a:t>هَلْ تُحِبُّ الطَّبِيعَةَ؟</a:t>
@@ -9731,6 +9809,7 @@
                   <a:srgbClr val="1B3B6F"/>
                 </a:solidFill>
                 <a:latin typeface="Amiri" pitchFamily="2" charset="-78"/>
+                <a:ea typeface="Amiri" pitchFamily="2" charset="-78"/>
                 <a:cs typeface="Amiri" pitchFamily="2" charset="-78"/>
               </a:rPr>
               <a:t>أُرِيدُ أَنْ أَرَى الغِزْلَانَ وَالطُّيُورَ النَّادِرَةَ.</a:t>
@@ -9807,6 +9886,7 @@
                   <a:srgbClr val="1B3B6F"/>
                 </a:solidFill>
                 <a:latin typeface="Amiri" pitchFamily="2" charset="-78"/>
+                <a:ea typeface="Amiri" pitchFamily="2" charset="-78"/>
                 <a:cs typeface="Amiri" pitchFamily="2" charset="-78"/>
               </a:rPr>
               <a:t>أَيَّ حَيَوَانَاتٍ تُرِيدُ أَنْ تَرَى؟</a:t>
@@ -9910,6 +9990,7 @@
                   <a:srgbClr val="1B3B6F"/>
                 </a:solidFill>
                 <a:latin typeface="Amiri" pitchFamily="2" charset="-78"/>
+                <a:ea typeface="Amiri" pitchFamily="2" charset="-78"/>
                 <a:cs typeface="Amiri" pitchFamily="2" charset="-78"/>
               </a:rPr>
               <a:t>كَمْ سَاعَةً نَمْشِي إِلَى البُحَيْرَةِ؟</a:t>
@@ -9986,6 +10067,7 @@
                   <a:srgbClr val="1B3B6F"/>
                 </a:solidFill>
                 <a:latin typeface="Amiri" pitchFamily="2" charset="-78"/>
+                <a:ea typeface="Amiri" pitchFamily="2" charset="-78"/>
                 <a:cs typeface="Amiri" pitchFamily="2" charset="-78"/>
               </a:rPr>
               <a:t>الطَّرِيقُ إِلَى البُحَيْرَةِ طَوِيلٌ.</a:t>
@@ -10089,6 +10171,7 @@
                   <a:srgbClr val="1B3B6F"/>
                 </a:solidFill>
                 <a:latin typeface="Amiri" pitchFamily="2" charset="-78"/>
+                <a:ea typeface="Amiri" pitchFamily="2" charset="-78"/>
                 <a:cs typeface="Amiri" pitchFamily="2" charset="-78"/>
               </a:rPr>
               <a:t>نَعَمْ، عِنْدِي زُجَاجَتَا مَاءٍ، وَحِذَاءٌ قَوِيٌّ لِلْمَشْيِ.</a:t>
@@ -10165,6 +10248,7 @@
                   <a:srgbClr val="1B3B6F"/>
                 </a:solidFill>
                 <a:latin typeface="Amiri" pitchFamily="2" charset="-78"/>
+                <a:ea typeface="Amiri" pitchFamily="2" charset="-78"/>
                 <a:cs typeface="Amiri" pitchFamily="2" charset="-78"/>
               </a:rPr>
               <a:t>هَلْ عِنْدَكَ مَاءٌ وَحِذَاءٌ مُنَاسِبٌ؟</a:t>
@@ -10374,6 +10458,7 @@
                   <a:srgbClr val="D4AF37"/>
                 </a:solidFill>
                 <a:latin typeface="Amiri" pitchFamily="2" charset="-78"/>
+                <a:ea typeface="Amiri" pitchFamily="2" charset="-78"/>
                 <a:cs typeface="Amiri" pitchFamily="2" charset="-78"/>
               </a:rPr>
               <a:t>م</a:t>
@@ -10694,6 +10779,7 @@
                   <a:srgbClr val="8A6D1E"/>
                 </a:solidFill>
                 <a:latin typeface="Amiri" pitchFamily="2" charset="-78"/>
+                <a:ea typeface="Amiri" pitchFamily="2" charset="-78"/>
                 <a:cs typeface="Amiri" pitchFamily="2" charset="-78"/>
               </a:rPr>
               <a:t>نَمُوذَجُ الإِجَابَةِ</a:t>
@@ -10936,6 +11022,7 @@
                   <a:srgbClr val="1B3B6F"/>
                 </a:solidFill>
                 <a:latin typeface="Amiri" pitchFamily="2" charset="-78"/>
+                <a:ea typeface="Amiri" pitchFamily="2" charset="-78"/>
                 <a:cs typeface="Amiri" pitchFamily="2" charset="-78"/>
               </a:rPr>
               <a:t>أُفَضِّلُ الصَّحْرَاءَ، لِأَنَّهَا هَادِئَةٌ وَوَاسِعَةٌ.</a:t>
@@ -11012,6 +11099,7 @@
                   <a:srgbClr val="1B3B6F"/>
                 </a:solidFill>
                 <a:latin typeface="Amiri" pitchFamily="2" charset="-78"/>
+                <a:ea typeface="Amiri" pitchFamily="2" charset="-78"/>
                 <a:cs typeface="Amiri" pitchFamily="2" charset="-78"/>
               </a:rPr>
               <a:t>أَيْنَ نَذْهَبُ: إِلَى الصَّحْرَاءِ أَمْ إِلَى الغَابَةِ؟</a:t>
@@ -11115,6 +11203,7 @@
                   <a:srgbClr val="1B3B6F"/>
                 </a:solidFill>
                 <a:latin typeface="Amiri" pitchFamily="2" charset="-78"/>
+                <a:ea typeface="Amiri" pitchFamily="2" charset="-78"/>
                 <a:cs typeface="Amiri" pitchFamily="2" charset="-78"/>
               </a:rPr>
               <a:t>سَنَرَى الكُثْبَانَ الرَّمْلِيَّةَ الذَّهَبِيَّةَ، وَالجِمَالَ.</a:t>
@@ -11191,6 +11280,7 @@
                   <a:srgbClr val="1B3B6F"/>
                 </a:solidFill>
                 <a:latin typeface="Amiri" pitchFamily="2" charset="-78"/>
+                <a:ea typeface="Amiri" pitchFamily="2" charset="-78"/>
                 <a:cs typeface="Amiri" pitchFamily="2" charset="-78"/>
               </a:rPr>
               <a:t>وَمَاذَا نَرَى هُنَاكَ؟</a:t>
@@ -11294,6 +11384,7 @@
                   <a:srgbClr val="1B3B6F"/>
                 </a:solidFill>
                 <a:latin typeface="Amiri" pitchFamily="2" charset="-78"/>
+                <a:ea typeface="Amiri" pitchFamily="2" charset="-78"/>
                 <a:cs typeface="Amiri" pitchFamily="2" charset="-78"/>
               </a:rPr>
               <a:t>إِذَنْ، مَتَى أَفْضَلُ وَقْتٍ لِلزِّيَارَةِ؟</a:t>
@@ -11370,6 +11461,7 @@
                   <a:srgbClr val="1B3B6F"/>
                 </a:solidFill>
                 <a:latin typeface="Amiri" pitchFamily="2" charset="-78"/>
+                <a:ea typeface="Amiri" pitchFamily="2" charset="-78"/>
                 <a:cs typeface="Amiri" pitchFamily="2" charset="-78"/>
               </a:rPr>
               <a:t>… لٰكِنَّ الصَّحْرَاءَ حَارَّةٌ جِدًّا!</a:t>
@@ -11473,6 +11565,7 @@
                   <a:srgbClr val="1B3B6F"/>
                 </a:solidFill>
                 <a:latin typeface="Amiri" pitchFamily="2" charset="-78"/>
+                <a:ea typeface="Amiri" pitchFamily="2" charset="-78"/>
                 <a:cs typeface="Amiri" pitchFamily="2" charset="-78"/>
               </a:rPr>
               <a:t>الصَّحْرَاءُ أَجْمَلُ مِنَ الغَابَةِ فِي اللَّيْلِ، لٰكِنَّ الغَابَةَ أَبْرَدُ فِي النَّهَارِ.</a:t>
@@ -11549,6 +11642,7 @@
                   <a:srgbClr val="1B3B6F"/>
                 </a:solidFill>
                 <a:latin typeface="Amiri" pitchFamily="2" charset="-78"/>
+                <a:ea typeface="Amiri" pitchFamily="2" charset="-78"/>
                 <a:cs typeface="Amiri" pitchFamily="2" charset="-78"/>
               </a:rPr>
               <a:t>فِي الشِّتَاءِ. وَفِي اللَّيْلِ يَكُونُ الجَوُّ بَارِدًا.</a:t>
@@ -11652,6 +11746,7 @@
                   <a:srgbClr val="1B3B6F"/>
                 </a:solidFill>
                 <a:latin typeface="Amiri" pitchFamily="2" charset="-78"/>
+                <a:ea typeface="Amiri" pitchFamily="2" charset="-78"/>
                 <a:cs typeface="Amiri" pitchFamily="2" charset="-78"/>
               </a:rPr>
               <a:t>يَعِيشُ الجَمَلُ فِي الصَّحْرَاءِ، لِأَنَّهُ يَصْبِرُ عَلَى العَطَشِ أَيَّامًا.</a:t>
@@ -11728,6 +11823,7 @@
                   <a:srgbClr val="1B3B6F"/>
                 </a:solidFill>
                 <a:latin typeface="Amiri" pitchFamily="2" charset="-78"/>
+                <a:ea typeface="Amiri" pitchFamily="2" charset="-78"/>
                 <a:cs typeface="Amiri" pitchFamily="2" charset="-78"/>
               </a:rPr>
               <a:t>مَا الحَيَوَانُ الَّذِي يَعِيشُ فِي الصَّحْرَاءِ؟</a:t>
@@ -11937,6 +12033,7 @@
                   <a:srgbClr val="D4AF37"/>
                 </a:solidFill>
                 <a:latin typeface="Amiri" pitchFamily="2" charset="-78"/>
+                <a:ea typeface="Amiri" pitchFamily="2" charset="-78"/>
                 <a:cs typeface="Amiri" pitchFamily="2" charset="-78"/>
               </a:rPr>
               <a:t>م</a:t>
@@ -12257,6 +12354,7 @@
                   <a:srgbClr val="8A6D1E"/>
                 </a:solidFill>
                 <a:latin typeface="Amiri" pitchFamily="2" charset="-78"/>
+                <a:ea typeface="Amiri" pitchFamily="2" charset="-78"/>
                 <a:cs typeface="Amiri" pitchFamily="2" charset="-78"/>
               </a:rPr>
               <a:t>نَمُوذَجُ الإِجَابَةِ</a:t>
@@ -12499,6 +12597,7 @@
                   <a:srgbClr val="1B3B6F"/>
                 </a:solidFill>
                 <a:latin typeface="Amiri" pitchFamily="2" charset="-78"/>
+                <a:ea typeface="Amiri" pitchFamily="2" charset="-78"/>
                 <a:cs typeface="Amiri" pitchFamily="2" charset="-78"/>
               </a:rPr>
               <a:t>أَخَذْتُهَا فِي جِبَالِ الأَطْلَسِ فِي المَغْرِبِ، عِنْدَمَا زُرْنَا قَرْيَةَ جَدِّي.</a:t>
@@ -12575,6 +12674,7 @@
                   <a:srgbClr val="1B3B6F"/>
                 </a:solidFill>
                 <a:latin typeface="Amiri" pitchFamily="2" charset="-78"/>
+                <a:ea typeface="Amiri" pitchFamily="2" charset="-78"/>
                 <a:cs typeface="Amiri" pitchFamily="2" charset="-78"/>
               </a:rPr>
               <a:t>أَيْنَ أَخَذْتَ هٰذِهِ الصُّورَةَ؟</a:t>
@@ -12678,6 +12778,7 @@
                   <a:srgbClr val="1B3B6F"/>
                 </a:solidFill>
                 <a:latin typeface="Amiri" pitchFamily="2" charset="-78"/>
+                <a:ea typeface="Amiri" pitchFamily="2" charset="-78"/>
                 <a:cs typeface="Amiri" pitchFamily="2" charset="-78"/>
               </a:rPr>
               <a:t>فِي الصُّورَةِ وَادٍ أَخْضَرُ، وَنَهْرٌ صَغِيرٌ، وَجِبَالٌ عَالِيَةٌ تُغَطِّيهَا الثُّلُوجُ.</a:t>
@@ -12754,6 +12855,7 @@
                   <a:srgbClr val="1B3B6F"/>
                 </a:solidFill>
                 <a:latin typeface="Amiri" pitchFamily="2" charset="-78"/>
+                <a:ea typeface="Amiri" pitchFamily="2" charset="-78"/>
                 <a:cs typeface="Amiri" pitchFamily="2" charset="-78"/>
               </a:rPr>
               <a:t>صِفْ مَا نَرَاهُ فِيهَا.</a:t>
@@ -12857,6 +12959,7 @@
                   <a:srgbClr val="1B3B6F"/>
                 </a:solidFill>
                 <a:latin typeface="Amiri" pitchFamily="2" charset="-78"/>
+                <a:ea typeface="Amiri" pitchFamily="2" charset="-78"/>
                 <a:cs typeface="Amiri" pitchFamily="2" charset="-78"/>
               </a:rPr>
               <a:t>نَعَمْ، هُنَاكَ قُرُودٌ صَغِيرَةٌ تَعِيشُ فِي الغَابَاتِ الَّتِي تُغَطِّي الجِبَالَ.</a:t>
@@ -12933,6 +13036,7 @@
                   <a:srgbClr val="1B3B6F"/>
                 </a:solidFill>
                 <a:latin typeface="Amiri" pitchFamily="2" charset="-78"/>
+                <a:ea typeface="Amiri" pitchFamily="2" charset="-78"/>
                 <a:cs typeface="Amiri" pitchFamily="2" charset="-78"/>
               </a:rPr>
               <a:t>وَهَلْ تُوجَدُ حَيَوَانَاتٌ؟</a:t>
@@ -13036,6 +13140,7 @@
                   <a:srgbClr val="1B3B6F"/>
                 </a:solidFill>
                 <a:latin typeface="Amiri" pitchFamily="2" charset="-78"/>
+                <a:ea typeface="Amiri" pitchFamily="2" charset="-78"/>
                 <a:cs typeface="Amiri" pitchFamily="2" charset="-78"/>
               </a:rPr>
               <a:t>لِأَنَّ الأَلْوَانَ جَمِيلَةٌ، وَلِأَنَّهَا تُذَكِّرُنِي بِأَجْمَلِ يَوْمٍ فِي العُطْلَةِ.</a:t>
@@ -13112,6 +13217,7 @@
                   <a:srgbClr val="1B3B6F"/>
                 </a:solidFill>
                 <a:latin typeface="Amiri" pitchFamily="2" charset="-78"/>
+                <a:ea typeface="Amiri" pitchFamily="2" charset="-78"/>
                 <a:cs typeface="Amiri" pitchFamily="2" charset="-78"/>
               </a:rPr>
               <a:t>لِمَاذَا اخْتَرْتَ هٰذِهِ الصُّورَةَ لِلْمُسَابَقَةِ؟</a:t>
@@ -13215,6 +13321,7 @@
                   <a:srgbClr val="1B3B6F"/>
                 </a:solidFill>
                 <a:latin typeface="Amiri" pitchFamily="2" charset="-78"/>
+                <a:ea typeface="Amiri" pitchFamily="2" charset="-78"/>
                 <a:cs typeface="Amiri" pitchFamily="2" charset="-78"/>
               </a:rPr>
               <a:t>سَأُصَوِّرُ الطُّيُورَ عَلَى سَاحِلِ وِيلْزَ، لِأَنَّ بَعْضَهَا نَادِرٌ جِدًّا.</a:t>
@@ -13291,6 +13398,7 @@
                   <a:srgbClr val="1B3B6F"/>
                 </a:solidFill>
                 <a:latin typeface="Amiri" pitchFamily="2" charset="-78"/>
+                <a:ea typeface="Amiri" pitchFamily="2" charset="-78"/>
                 <a:cs typeface="Amiri" pitchFamily="2" charset="-78"/>
               </a:rPr>
               <a:t>أَيْنَ سَتُصَوِّرُ فِي المَرَّةِ القَادِمَةِ؟</a:t>
@@ -13500,6 +13608,7 @@
                   <a:srgbClr val="D4AF37"/>
                 </a:solidFill>
                 <a:latin typeface="Amiri" pitchFamily="2" charset="-78"/>
+                <a:ea typeface="Amiri" pitchFamily="2" charset="-78"/>
                 <a:cs typeface="Amiri" pitchFamily="2" charset="-78"/>
               </a:rPr>
               <a:t>م</a:t>
@@ -13820,6 +13929,7 @@
                   <a:srgbClr val="8A6D1E"/>
                 </a:solidFill>
                 <a:latin typeface="Amiri" pitchFamily="2" charset="-78"/>
+                <a:ea typeface="Amiri" pitchFamily="2" charset="-78"/>
                 <a:cs typeface="Amiri" pitchFamily="2" charset="-78"/>
               </a:rPr>
               <a:t>نَمُوذَجُ الإِجَابَةِ</a:t>
@@ -14062,6 +14172,7 @@
                   <a:srgbClr val="1B3B6F"/>
                 </a:solidFill>
                 <a:latin typeface="Amiri" pitchFamily="2" charset="-78"/>
+                <a:ea typeface="Amiri" pitchFamily="2" charset="-78"/>
                 <a:cs typeface="Amiri" pitchFamily="2" charset="-78"/>
               </a:rPr>
               <a:t>لِأَنَّ كَثِيرًا مِنَ الحَيَوَانَاتِ مُهَدَّدَةٌ بِالانْقِرَاضِ؛ فَمَثَلًا لَمْ يَبْقَ مِنَ النَّمِرِ العَرَبِيِّ إِلَّا القَلِيلُ.</a:t>
@@ -14138,6 +14249,7 @@
                   <a:srgbClr val="1B3B6F"/>
                 </a:solidFill>
                 <a:latin typeface="Amiri" pitchFamily="2" charset="-78"/>
+                <a:ea typeface="Amiri" pitchFamily="2" charset="-78"/>
                 <a:cs typeface="Amiri" pitchFamily="2" charset="-78"/>
               </a:rPr>
               <a:t>لِمَاذَا تَتَطَوَّعُ لِحِمَايَةِ الحَيَوَانَاتِ؟</a:t>
@@ -14241,6 +14353,7 @@
                   <a:srgbClr val="1B3B6F"/>
                 </a:solidFill>
                 <a:latin typeface="Amiri" pitchFamily="2" charset="-78"/>
+                <a:ea typeface="Amiri" pitchFamily="2" charset="-78"/>
                 <a:cs typeface="Amiri" pitchFamily="2" charset="-78"/>
               </a:rPr>
               <a:t>كَانَتِ الغَابَاتُ تُغَطِّي مِسَاحَاتٍ أَكْبَرَ بِكَثِيرٍ، أَمَّا اليَوْمَ فَتَحَوَّلَ كَثِيرٌ مِنْهَا إِلَى مُدُنٍ وَطُرُقٍ.</a:t>
@@ -14317,6 +14430,7 @@
                   <a:srgbClr val="1B3B6F"/>
                 </a:solidFill>
                 <a:latin typeface="Amiri" pitchFamily="2" charset="-78"/>
+                <a:ea typeface="Amiri" pitchFamily="2" charset="-78"/>
                 <a:cs typeface="Amiri" pitchFamily="2" charset="-78"/>
               </a:rPr>
               <a:t>كَيْفَ كَانَتِ الطَّبِيعَةُ فِي المَاضِي؟</a:t>
@@ -14420,6 +14534,7 @@
                   <a:srgbClr val="1B3B6F"/>
                 </a:solidFill>
                 <a:latin typeface="Amiri" pitchFamily="2" charset="-78"/>
+                <a:ea typeface="Amiri" pitchFamily="2" charset="-78"/>
                 <a:cs typeface="Amiri" pitchFamily="2" charset="-78"/>
               </a:rPr>
               <a:t>نَظَّفْنَا ضِفَّةَ النَّهْرِ مِنَ البْلَاسْتِيكِ، فَعَادَتِ البَطُّ وَالأَسْمَاكُ بَعْدَ شُهُورٍ قَلِيلَةٍ.</a:t>
@@ -14496,6 +14611,7 @@
                   <a:srgbClr val="1B3B6F"/>
                 </a:solidFill>
                 <a:latin typeface="Amiri" pitchFamily="2" charset="-78"/>
+                <a:ea typeface="Amiri" pitchFamily="2" charset="-78"/>
                 <a:cs typeface="Amiri" pitchFamily="2" charset="-78"/>
               </a:rPr>
               <a:t>مَاذَا فَعَلْتُمْ فِي مَجْمُوعَتِكُمْ؟</a:t>
@@ -14599,6 +14715,7 @@
                   <a:srgbClr val="1B3B6F"/>
                 </a:solidFill>
                 <a:latin typeface="Amiri" pitchFamily="2" charset="-78"/>
+                <a:ea typeface="Amiri" pitchFamily="2" charset="-78"/>
                 <a:cs typeface="Amiri" pitchFamily="2" charset="-78"/>
               </a:rPr>
               <a:t>صَحِيحٌ أَنَّ حَاجَاتِ النَّاسِ مُهِمَّةٌ، غَيْرَ أَنَّ النِّظَامَ البِيئِيَّ إِذَا انْهَارَ، فَسَيَتَضَرَّرُ الإِنْسَانُ أَيْضًا.</a:t>
@@ -14675,6 +14792,7 @@
                   <a:srgbClr val="1B3B6F"/>
                 </a:solidFill>
                 <a:latin typeface="Amiri" pitchFamily="2" charset="-78"/>
+                <a:ea typeface="Amiri" pitchFamily="2" charset="-78"/>
                 <a:cs typeface="Amiri" pitchFamily="2" charset="-78"/>
               </a:rPr>
               <a:t>أَلَيْسَ النَّاسُ أَهَمَّ مِنَ الحَيَوَانَاتِ؟</a:t>
@@ -14778,6 +14896,7 @@
                   <a:srgbClr val="1B3B6F"/>
                 </a:solidFill>
                 <a:latin typeface="Amiri" pitchFamily="2" charset="-78"/>
+                <a:ea typeface="Amiri" pitchFamily="2" charset="-78"/>
                 <a:cs typeface="Amiri" pitchFamily="2" charset="-78"/>
               </a:rPr>
               <a:t>لَوْ كُنْتُ حَيَوَانًا، لَكُنْتُ صَقْرًا، لِأَنِّي أُرِيدُ أَنْ أَرَى الصَّحْرَاءَ وَالجِبَالَ مِنْ فَوْقُ.</a:t>
@@ -14854,6 +14973,7 @@
                   <a:srgbClr val="1B3B6F"/>
                 </a:solidFill>
                 <a:latin typeface="Amiri" pitchFamily="2" charset="-78"/>
+                <a:ea typeface="Amiri" pitchFamily="2" charset="-78"/>
                 <a:cs typeface="Amiri" pitchFamily="2" charset="-78"/>
               </a:rPr>
               <a:t>لَوْ كُنْتَ حَيَوَانًا، أَيَّ حَيَوَانٍ تَكُونُ؟</a:t>
@@ -15063,6 +15183,7 @@
                   <a:srgbClr val="D4AF37"/>
                 </a:solidFill>
                 <a:latin typeface="Amiri" pitchFamily="2" charset="-78"/>
+                <a:ea typeface="Amiri" pitchFamily="2" charset="-78"/>
                 <a:cs typeface="Amiri" pitchFamily="2" charset="-78"/>
               </a:rPr>
               <a:t>م</a:t>
@@ -15383,6 +15504,7 @@
                   <a:srgbClr val="8A6D1E"/>
                 </a:solidFill>
                 <a:latin typeface="Amiri" pitchFamily="2" charset="-78"/>
+                <a:ea typeface="Amiri" pitchFamily="2" charset="-78"/>
                 <a:cs typeface="Amiri" pitchFamily="2" charset="-78"/>
               </a:rPr>
               <a:t>الطَّبِيعَةُ حَوْلِي</a:t>
@@ -15663,6 +15785,7 @@
                   <a:srgbClr val="1B3B6F"/>
                 </a:solidFill>
                 <a:latin typeface="Amiri" pitchFamily="2" charset="-78"/>
+                <a:ea typeface="Amiri" pitchFamily="2" charset="-78"/>
                 <a:cs typeface="Amiri" pitchFamily="2" charset="-78"/>
               </a:rPr>
               <a:t>نَعَمْ، أُحِبُّ … لِأَنَّ …</a:t>
@@ -15739,6 +15862,7 @@
                   <a:srgbClr val="1B3B6F"/>
                 </a:solidFill>
                 <a:latin typeface="Amiri" pitchFamily="2" charset="-78"/>
+                <a:ea typeface="Amiri" pitchFamily="2" charset="-78"/>
                 <a:cs typeface="Amiri" pitchFamily="2" charset="-78"/>
               </a:rPr>
               <a:t>هَلْ تُحِبُّ الطَّبِيعَةَ؟</a:t>
@@ -15907,6 +16031,7 @@
                   <a:srgbClr val="1B3B6F"/>
                 </a:solidFill>
                 <a:latin typeface="Amiri" pitchFamily="2" charset="-78"/>
+                <a:ea typeface="Amiri" pitchFamily="2" charset="-78"/>
                 <a:cs typeface="Amiri" pitchFamily="2" charset="-78"/>
               </a:rPr>
               <a:t>نَعَمْ، يُوجَدُ نَهْرٌ … وَتُوجَدُ …</a:t>
@@ -15983,6 +16108,7 @@
                   <a:srgbClr val="1B3B6F"/>
                 </a:solidFill>
                 <a:latin typeface="Amiri" pitchFamily="2" charset="-78"/>
+                <a:ea typeface="Amiri" pitchFamily="2" charset="-78"/>
                 <a:cs typeface="Amiri" pitchFamily="2" charset="-78"/>
               </a:rPr>
               <a:t>هَلْ تُوجَدُ جِبَالٌ أَوْ أَنْهَارٌ قُرْبَ مَدِينَتِكَ؟</a:t>
@@ -16151,6 +16277,7 @@
                   <a:srgbClr val="1B3B6F"/>
                 </a:solidFill>
                 <a:latin typeface="Amiri" pitchFamily="2" charset="-78"/>
+                <a:ea typeface="Amiri" pitchFamily="2" charset="-78"/>
                 <a:cs typeface="Amiri" pitchFamily="2" charset="-78"/>
               </a:rPr>
               <a:t>حَيَوَانِي المُفَضَّلُ … لِأَنَّهُ …</a:t>
@@ -16227,6 +16354,7 @@
                   <a:srgbClr val="1B3B6F"/>
                 </a:solidFill>
                 <a:latin typeface="Amiri" pitchFamily="2" charset="-78"/>
+                <a:ea typeface="Amiri" pitchFamily="2" charset="-78"/>
                 <a:cs typeface="Amiri" pitchFamily="2" charset="-78"/>
               </a:rPr>
               <a:t>مَا حَيَوَانُكَ المُفَضَّلُ؟</a:t>
@@ -16395,6 +16523,7 @@
                   <a:srgbClr val="1B3B6F"/>
                 </a:solidFill>
                 <a:latin typeface="Amiri" pitchFamily="2" charset="-78"/>
+                <a:ea typeface="Amiri" pitchFamily="2" charset="-78"/>
                 <a:cs typeface="Amiri" pitchFamily="2" charset="-78"/>
               </a:rPr>
               <a:t>يَعِيشُ الجَمَلُ فِي …</a:t>
@@ -16471,6 +16600,7 @@
                   <a:srgbClr val="1B3B6F"/>
                 </a:solidFill>
                 <a:latin typeface="Amiri" pitchFamily="2" charset="-78"/>
+                <a:ea typeface="Amiri" pitchFamily="2" charset="-78"/>
                 <a:cs typeface="Amiri" pitchFamily="2" charset="-78"/>
               </a:rPr>
               <a:t>أَيْنَ يَعِيشُ الجَمَلُ؟</a:t>
@@ -16639,6 +16769,7 @@
                   <a:srgbClr val="1B3B6F"/>
                 </a:solidFill>
                 <a:latin typeface="Amiri" pitchFamily="2" charset="-78"/>
+                <a:ea typeface="Amiri" pitchFamily="2" charset="-78"/>
                 <a:cs typeface="Amiri" pitchFamily="2" charset="-78"/>
               </a:rPr>
               <a:t>أُفَضِّلُ … لِأَنَّ …</a:t>
@@ -16715,6 +16846,7 @@
                   <a:srgbClr val="1B3B6F"/>
                 </a:solidFill>
                 <a:latin typeface="Amiri" pitchFamily="2" charset="-78"/>
+                <a:ea typeface="Amiri" pitchFamily="2" charset="-78"/>
                 <a:cs typeface="Amiri" pitchFamily="2" charset="-78"/>
               </a:rPr>
               <a:t>هَلْ تُفَضِّلُ البَحْرَ أَمِ الجَبَلَ؟</a:t>
@@ -16869,6 +17001,7 @@
                   <a:srgbClr val="1B3B6F"/>
                 </a:solidFill>
                 <a:latin typeface="Amiri" pitchFamily="2" charset="-78"/>
+                <a:ea typeface="Amiri" pitchFamily="2" charset="-78"/>
                 <a:cs typeface="Amiri" pitchFamily="2" charset="-78"/>
               </a:rPr>
               <a:t>عَفْوًا، هَلْ يُمْكِنُ أَنْ تُعِيدَ السُّؤَالَ؟</a:t>
@@ -17002,6 +17135,7 @@
                   <a:srgbClr val="D4AF37"/>
                 </a:solidFill>
                 <a:latin typeface="Amiri" pitchFamily="2" charset="-78"/>
+                <a:ea typeface="Amiri" pitchFamily="2" charset="-78"/>
                 <a:cs typeface="Amiri" pitchFamily="2" charset="-78"/>
               </a:rPr>
               <a:t>م</a:t>
@@ -17322,6 +17456,7 @@
                   <a:srgbClr val="8A6D1E"/>
                 </a:solidFill>
                 <a:latin typeface="Amiri" pitchFamily="2" charset="-78"/>
+                <a:ea typeface="Amiri" pitchFamily="2" charset="-78"/>
                 <a:cs typeface="Amiri" pitchFamily="2" charset="-78"/>
               </a:rPr>
               <a:t>المَنَاظِرُ وَالحَيَوَانَاتُ</a:t>
@@ -17602,6 +17737,7 @@
                   <a:srgbClr val="1B3B6F"/>
                 </a:solidFill>
                 <a:latin typeface="Amiri" pitchFamily="2" charset="-78"/>
+                <a:ea typeface="Amiri" pitchFamily="2" charset="-78"/>
                 <a:cs typeface="Amiri" pitchFamily="2" charset="-78"/>
               </a:rPr>
               <a:t>أَجْمَلُ مَكَانٍ زُرْتُهُ … فِيهِ …</a:t>
@@ -17678,6 +17814,7 @@
                   <a:srgbClr val="1B3B6F"/>
                 </a:solidFill>
                 <a:latin typeface="Amiri" pitchFamily="2" charset="-78"/>
+                <a:ea typeface="Amiri" pitchFamily="2" charset="-78"/>
                 <a:cs typeface="Amiri" pitchFamily="2" charset="-78"/>
               </a:rPr>
               <a:t>صِفْ أَجْمَلَ مَكَانٍ طَبِيعِيٍّ زُرْتَهُ.</a:t>
@@ -17781,6 +17918,7 @@
                   <a:srgbClr val="1B3B6F"/>
                 </a:solidFill>
                 <a:latin typeface="Amiri" pitchFamily="2" charset="-78"/>
+                <a:ea typeface="Amiri" pitchFamily="2" charset="-78"/>
                 <a:cs typeface="Amiri" pitchFamily="2" charset="-78"/>
               </a:rPr>
               <a:t>نَعَمْ، عِنْدِي … لَوْنُهُ … وَهُوَ …</a:t>
@@ -17857,6 +17995,7 @@
                   <a:srgbClr val="1B3B6F"/>
                 </a:solidFill>
                 <a:latin typeface="Amiri" pitchFamily="2" charset="-78"/>
+                <a:ea typeface="Amiri" pitchFamily="2" charset="-78"/>
                 <a:cs typeface="Amiri" pitchFamily="2" charset="-78"/>
               </a:rPr>
               <a:t>هَلْ عِنْدَكَ حَيَوَانٌ أَلِيفٌ؟ صِفْهُ.</a:t>
@@ -17960,6 +18099,7 @@
                   <a:srgbClr val="1B3B6F"/>
                 </a:solidFill>
                 <a:latin typeface="Amiri" pitchFamily="2" charset="-78"/>
+                <a:ea typeface="Amiri" pitchFamily="2" charset="-78"/>
                 <a:cs typeface="Amiri" pitchFamily="2" charset="-78"/>
               </a:rPr>
               <a:t>لِأَنَّهَا … وَتُسَاعِدُ …</a:t>
@@ -18036,6 +18176,7 @@
                   <a:srgbClr val="1B3B6F"/>
                 </a:solidFill>
                 <a:latin typeface="Amiri" pitchFamily="2" charset="-78"/>
+                <a:ea typeface="Amiri" pitchFamily="2" charset="-78"/>
                 <a:cs typeface="Amiri" pitchFamily="2" charset="-78"/>
               </a:rPr>
               <a:t>لِمَاذَا يُحِبُّ النَّاسُ قَضَاءَ الوَقْتِ فِي الطَّبِيعَةِ؟</a:t>
@@ -18139,6 +18280,7 @@
                   <a:srgbClr val="1B3B6F"/>
                 </a:solidFill>
                 <a:latin typeface="Amiri" pitchFamily="2" charset="-78"/>
+                <a:ea typeface="Amiri" pitchFamily="2" charset="-78"/>
                 <a:cs typeface="Amiri" pitchFamily="2" charset="-78"/>
               </a:rPr>
               <a:t>تَعِيشُ … وَ… فِي …</a:t>
@@ -18215,6 +18357,7 @@
                   <a:srgbClr val="1B3B6F"/>
                 </a:solidFill>
                 <a:latin typeface="Amiri" pitchFamily="2" charset="-78"/>
+                <a:ea typeface="Amiri" pitchFamily="2" charset="-78"/>
                 <a:cs typeface="Amiri" pitchFamily="2" charset="-78"/>
               </a:rPr>
               <a:t>مَا الحَيَوَانَاتُ الَّتِي تَعِيشُ فِي بِلَادِكَ؟</a:t>
@@ -18318,6 +18461,7 @@
                   <a:srgbClr val="1B3B6F"/>
                 </a:solidFill>
                 <a:latin typeface="Amiri" pitchFamily="2" charset="-78"/>
+                <a:ea typeface="Amiri" pitchFamily="2" charset="-78"/>
                 <a:cs typeface="Amiri" pitchFamily="2" charset="-78"/>
               </a:rPr>
               <a:t>أُرِيدُ أَنْ أَزُورَ … لِأَرَى …</a:t>
@@ -18394,6 +18538,7 @@
                   <a:srgbClr val="1B3B6F"/>
                 </a:solidFill>
                 <a:latin typeface="Amiri" pitchFamily="2" charset="-78"/>
+                <a:ea typeface="Amiri" pitchFamily="2" charset="-78"/>
                 <a:cs typeface="Amiri" pitchFamily="2" charset="-78"/>
               </a:rPr>
               <a:t>أَيْنَ تُرِيدُ أَنْ تَذْهَبَ لِتَرَى الطَّبِيعَةَ؟</a:t>
@@ -18603,6 +18748,7 @@
                   <a:srgbClr val="D4AF37"/>
                 </a:solidFill>
                 <a:latin typeface="Amiri" pitchFamily="2" charset="-78"/>
+                <a:ea typeface="Amiri" pitchFamily="2" charset="-78"/>
                 <a:cs typeface="Amiri" pitchFamily="2" charset="-78"/>
               </a:rPr>
               <a:t>م</a:t>
@@ -18923,6 +19069,7 @@
                   <a:srgbClr val="8A6D1E"/>
                 </a:solidFill>
                 <a:latin typeface="Amiri" pitchFamily="2" charset="-78"/>
+                <a:ea typeface="Amiri" pitchFamily="2" charset="-78"/>
                 <a:cs typeface="Amiri" pitchFamily="2" charset="-78"/>
               </a:rPr>
               <a:t>الإِنْسَانُ وَالطَّبِيعَةُ</a:t>
@@ -19203,6 +19350,7 @@
                   <a:srgbClr val="1B3B6F"/>
                 </a:solidFill>
                 <a:latin typeface="Amiri" pitchFamily="2" charset="-78"/>
+                <a:ea typeface="Amiri" pitchFamily="2" charset="-78"/>
                 <a:cs typeface="Amiri" pitchFamily="2" charset="-78"/>
               </a:rPr>
               <a:t>صَحِيحٌ أَنَّ … غَيْرَ أَنَّ …</a:t>
@@ -19279,6 +19427,7 @@
                   <a:srgbClr val="1B3B6F"/>
                 </a:solidFill>
                 <a:latin typeface="Amiri" pitchFamily="2" charset="-78"/>
+                <a:ea typeface="Amiri" pitchFamily="2" charset="-78"/>
                 <a:cs typeface="Amiri" pitchFamily="2" charset="-78"/>
               </a:rPr>
               <a:t>هَلْ حَدَائِقُ الحَيَوَانِ مُفِيدَةٌ أَمْ ظَالِمَةٌ؟</a:t>
@@ -19382,6 +19531,7 @@
                   <a:srgbClr val="1B3B6F"/>
                 </a:solidFill>
                 <a:latin typeface="Amiri" pitchFamily="2" charset="-78"/>
+                <a:ea typeface="Amiri" pitchFamily="2" charset="-78"/>
                 <a:cs typeface="Amiri" pitchFamily="2" charset="-78"/>
               </a:rPr>
               <a:t>بِسَبَبِ … وَ… مِمَّا يُدَمِّرُ …</a:t>
@@ -19458,6 +19608,7 @@
                   <a:srgbClr val="1B3B6F"/>
                 </a:solidFill>
                 <a:latin typeface="Amiri" pitchFamily="2" charset="-78"/>
+                <a:ea typeface="Amiri" pitchFamily="2" charset="-78"/>
                 <a:cs typeface="Amiri" pitchFamily="2" charset="-78"/>
               </a:rPr>
               <a:t>لِمَاذَا تَخْتَفِي بَعْضُ الحَيَوَانَاتِ؟</a:t>
@@ -19561,6 +19712,7 @@
                   <a:srgbClr val="1B3B6F"/>
                 </a:solidFill>
                 <a:latin typeface="Amiri" pitchFamily="2" charset="-78"/>
+                <a:ea typeface="Amiri" pitchFamily="2" charset="-78"/>
                 <a:cs typeface="Amiri" pitchFamily="2" charset="-78"/>
               </a:rPr>
               <a:t>كَانَ هُنَاكَ … أَمَّا الآنَ فَقَدْ …</a:t>
@@ -19637,6 +19789,7 @@
                   <a:srgbClr val="1B3B6F"/>
                 </a:solidFill>
                 <a:latin typeface="Amiri" pitchFamily="2" charset="-78"/>
+                <a:ea typeface="Amiri" pitchFamily="2" charset="-78"/>
                 <a:cs typeface="Amiri" pitchFamily="2" charset="-78"/>
               </a:rPr>
               <a:t>كَيْفَ تَغَيَّرَتِ الطَّبِيعَةُ فِي مِنْطَقَتِكَ؟</a:t>
@@ -19740,6 +19893,7 @@
                   <a:srgbClr val="1B3B6F"/>
                 </a:solidFill>
                 <a:latin typeface="Amiri" pitchFamily="2" charset="-78"/>
+                <a:ea typeface="Amiri" pitchFamily="2" charset="-78"/>
                 <a:cs typeface="Amiri" pitchFamily="2" charset="-78"/>
               </a:rPr>
               <a:t>يَسْتَطِيعُونَ أَنْ … مَثَلًا …</a:t>
@@ -19816,6 +19970,7 @@
                   <a:srgbClr val="1B3B6F"/>
                 </a:solidFill>
                 <a:latin typeface="Amiri" pitchFamily="2" charset="-78"/>
+                <a:ea typeface="Amiri" pitchFamily="2" charset="-78"/>
                 <a:cs typeface="Amiri" pitchFamily="2" charset="-78"/>
               </a:rPr>
               <a:t>مَا الَّذِي يَسْتَطِيعُ الشَّبَابُ أَنْ يَفْعَلُوهُ لِلطَّبِيعَةِ؟</a:t>
@@ -19919,6 +20074,7 @@
                   <a:srgbClr val="1B3B6F"/>
                 </a:solidFill>
                 <a:latin typeface="Amiri" pitchFamily="2" charset="-78"/>
+                <a:ea typeface="Amiri" pitchFamily="2" charset="-78"/>
                 <a:cs typeface="Amiri" pitchFamily="2" charset="-78"/>
               </a:rPr>
               <a:t>لَوِ اخْتَفَتِ الطُّيُورُ، لَأَصْبَحَ …</a:t>
@@ -19995,6 +20151,7 @@
                   <a:srgbClr val="1B3B6F"/>
                 </a:solidFill>
                 <a:latin typeface="Amiri" pitchFamily="2" charset="-78"/>
+                <a:ea typeface="Amiri" pitchFamily="2" charset="-78"/>
                 <a:cs typeface="Amiri" pitchFamily="2" charset="-78"/>
               </a:rPr>
               <a:t>لَوِ اخْتَفَتِ الطُّيُورُ مِنَ العَالَمِ، كَيْفَ تَكُونُ الحَيَاةُ؟</a:t>
@@ -20204,6 +20361,7 @@
                   <a:srgbClr val="D4AF37"/>
                 </a:solidFill>
                 <a:latin typeface="Amiri" pitchFamily="2" charset="-78"/>
+                <a:ea typeface="Amiri" pitchFamily="2" charset="-78"/>
                 <a:cs typeface="Amiri" pitchFamily="2" charset="-78"/>
               </a:rPr>
               <a:t>م</a:t>
@@ -20524,6 +20682,7 @@
                   <a:srgbClr val="8A6D1E"/>
                 </a:solidFill>
                 <a:latin typeface="Amiri" pitchFamily="2" charset="-78"/>
+                <a:ea typeface="Amiri" pitchFamily="2" charset="-78"/>
                 <a:cs typeface="Amiri" pitchFamily="2" charset="-78"/>
               </a:rPr>
               <a:t>آدَابُ الصَّفِّ</a:t>
@@ -22055,6 +22214,7 @@
                   <a:srgbClr val="D4AF37"/>
                 </a:solidFill>
                 <a:latin typeface="Amiri" pitchFamily="2" charset="-78"/>
+                <a:ea typeface="Amiri" pitchFamily="2" charset="-78"/>
                 <a:cs typeface="Amiri" pitchFamily="2" charset="-78"/>
               </a:rPr>
               <a:t>م</a:t>
@@ -22375,6 +22535,7 @@
                   <a:srgbClr val="8A6D1E"/>
                 </a:solidFill>
                 <a:latin typeface="Amiri" pitchFamily="2" charset="-78"/>
+                <a:ea typeface="Amiri" pitchFamily="2" charset="-78"/>
                 <a:cs typeface="Amiri" pitchFamily="2" charset="-78"/>
               </a:rPr>
               <a:t>نَمُوذَجُ الإِجَابَةِ</a:t>
@@ -22617,6 +22778,7 @@
                   <a:srgbClr val="1B3B6F"/>
                 </a:solidFill>
                 <a:latin typeface="Amiri" pitchFamily="2" charset="-78"/>
+                <a:ea typeface="Amiri" pitchFamily="2" charset="-78"/>
                 <a:cs typeface="Amiri" pitchFamily="2" charset="-78"/>
               </a:rPr>
               <a:t>نَعَمْ، أُحِبُّ الطَّبِيعَةَ لِأَنَّهَا هَادِئَةٌ وَجَمِيلَةٌ.</a:t>
@@ -22693,6 +22855,7 @@
                   <a:srgbClr val="1B3B6F"/>
                 </a:solidFill>
                 <a:latin typeface="Amiri" pitchFamily="2" charset="-78"/>
+                <a:ea typeface="Amiri" pitchFamily="2" charset="-78"/>
                 <a:cs typeface="Amiri" pitchFamily="2" charset="-78"/>
               </a:rPr>
               <a:t>هَلْ تُحِبُّ الطَّبِيعَةَ؟</a:t>
@@ -22796,6 +22959,7 @@
                   <a:srgbClr val="1B3B6F"/>
                 </a:solidFill>
                 <a:latin typeface="Amiri" pitchFamily="2" charset="-78"/>
+                <a:ea typeface="Amiri" pitchFamily="2" charset="-78"/>
                 <a:cs typeface="Amiri" pitchFamily="2" charset="-78"/>
               </a:rPr>
               <a:t>نَعَمْ، يُوجَدُ نَهْرٌ طَوِيلٌ، وَتُوجَدُ تِلَالٌ خَضْرَاءُ.</a:t>
@@ -22872,6 +23036,7 @@
                   <a:srgbClr val="1B3B6F"/>
                 </a:solidFill>
                 <a:latin typeface="Amiri" pitchFamily="2" charset="-78"/>
+                <a:ea typeface="Amiri" pitchFamily="2" charset="-78"/>
                 <a:cs typeface="Amiri" pitchFamily="2" charset="-78"/>
               </a:rPr>
               <a:t>هَلْ تُوجَدُ جِبَالٌ أَوْ أَنْهَارٌ قُرْبَ مَدِينَتِكَ؟</a:t>
@@ -22975,6 +23140,7 @@
                   <a:srgbClr val="1B3B6F"/>
                 </a:solidFill>
                 <a:latin typeface="Amiri" pitchFamily="2" charset="-78"/>
+                <a:ea typeface="Amiri" pitchFamily="2" charset="-78"/>
                 <a:cs typeface="Amiri" pitchFamily="2" charset="-78"/>
               </a:rPr>
               <a:t>حَيَوَانِيَ المُفَضَّلُ الدُّلْفِينُ، لِأَنَّهُ ذَكِيٌّ.</a:t>
@@ -23051,6 +23217,7 @@
                   <a:srgbClr val="1B3B6F"/>
                 </a:solidFill>
                 <a:latin typeface="Amiri" pitchFamily="2" charset="-78"/>
+                <a:ea typeface="Amiri" pitchFamily="2" charset="-78"/>
                 <a:cs typeface="Amiri" pitchFamily="2" charset="-78"/>
               </a:rPr>
               <a:t>مَا حَيَوَانُكَ المُفَضَّلُ؟</a:t>
@@ -23154,6 +23321,7 @@
                   <a:srgbClr val="1B3B6F"/>
                 </a:solidFill>
                 <a:latin typeface="Amiri" pitchFamily="2" charset="-78"/>
+                <a:ea typeface="Amiri" pitchFamily="2" charset="-78"/>
                 <a:cs typeface="Amiri" pitchFamily="2" charset="-78"/>
               </a:rPr>
               <a:t>يَعِيشُ الجَمَلُ فِي الصَّحْرَاءِ.</a:t>
@@ -23230,6 +23398,7 @@
                   <a:srgbClr val="1B3B6F"/>
                 </a:solidFill>
                 <a:latin typeface="Amiri" pitchFamily="2" charset="-78"/>
+                <a:ea typeface="Amiri" pitchFamily="2" charset="-78"/>
                 <a:cs typeface="Amiri" pitchFamily="2" charset="-78"/>
               </a:rPr>
               <a:t>أَيْنَ يَعِيشُ الجَمَلُ؟</a:t>
@@ -23333,6 +23502,7 @@
                   <a:srgbClr val="1B3B6F"/>
                 </a:solidFill>
                 <a:latin typeface="Amiri" pitchFamily="2" charset="-78"/>
+                <a:ea typeface="Amiri" pitchFamily="2" charset="-78"/>
                 <a:cs typeface="Amiri" pitchFamily="2" charset="-78"/>
               </a:rPr>
               <a:t>أُفَضِّلُ البَحْرَ، لِأَنِّي أُحِبُّ السِّبَاحَةَ.</a:t>
@@ -23409,6 +23579,7 @@
                   <a:srgbClr val="1B3B6F"/>
                 </a:solidFill>
                 <a:latin typeface="Amiri" pitchFamily="2" charset="-78"/>
+                <a:ea typeface="Amiri" pitchFamily="2" charset="-78"/>
                 <a:cs typeface="Amiri" pitchFamily="2" charset="-78"/>
               </a:rPr>
               <a:t>هَلْ تُفَضِّلُ البَحْرَ أَمِ الجَبَلَ؟</a:t>
@@ -23618,6 +23789,7 @@
                   <a:srgbClr val="D4AF37"/>
                 </a:solidFill>
                 <a:latin typeface="Amiri" pitchFamily="2" charset="-78"/>
+                <a:ea typeface="Amiri" pitchFamily="2" charset="-78"/>
                 <a:cs typeface="Amiri" pitchFamily="2" charset="-78"/>
               </a:rPr>
               <a:t>م</a:t>
@@ -23938,6 +24110,7 @@
                   <a:srgbClr val="8A6D1E"/>
                 </a:solidFill>
                 <a:latin typeface="Amiri" pitchFamily="2" charset="-78"/>
+                <a:ea typeface="Amiri" pitchFamily="2" charset="-78"/>
                 <a:cs typeface="Amiri" pitchFamily="2" charset="-78"/>
               </a:rPr>
               <a:t>نَمُوذَجُ الإِجَابَةِ</a:t>
@@ -24180,6 +24353,7 @@
                   <a:srgbClr val="1B3B6F"/>
                 </a:solidFill>
                 <a:latin typeface="Amiri" pitchFamily="2" charset="-78"/>
+                <a:ea typeface="Amiri" pitchFamily="2" charset="-78"/>
                 <a:cs typeface="Amiri" pitchFamily="2" charset="-78"/>
               </a:rPr>
               <a:t>أَجْمَلُ مَكَانٍ زُرْتُهُ بُحَيْرَةُ وِينْدِرْمِيرَ؛ فِيهَا مَاءٌ صَافٍ، وَحَوْلَهَا تِلَالٌ خَضْرَاءُ وَغَابَاتٌ كَثِيفَةٌ.</a:t>
@@ -24256,6 +24430,7 @@
                   <a:srgbClr val="1B3B6F"/>
                 </a:solidFill>
                 <a:latin typeface="Amiri" pitchFamily="2" charset="-78"/>
+                <a:ea typeface="Amiri" pitchFamily="2" charset="-78"/>
                 <a:cs typeface="Amiri" pitchFamily="2" charset="-78"/>
               </a:rPr>
               <a:t>صِفْ أَجْمَلَ مَكَانٍ طَبِيعِيٍّ زُرْتَهُ.</a:t>
@@ -24359,6 +24534,7 @@
                   <a:srgbClr val="1B3B6F"/>
                 </a:solidFill>
                 <a:latin typeface="Amiri" pitchFamily="2" charset="-78"/>
+                <a:ea typeface="Amiri" pitchFamily="2" charset="-78"/>
                 <a:cs typeface="Amiri" pitchFamily="2" charset="-78"/>
               </a:rPr>
               <a:t>نَعَمْ، عِنْدِي قِطَّةٌ بَيْضَاءُ اسْمُهَا ثَلْجَةُ، عَيْنَاهَا زَرْقَاوَانِ، وَهِيَ كَسُولَةٌ جِدًّا!</a:t>
@@ -24435,6 +24611,7 @@
                   <a:srgbClr val="1B3B6F"/>
                 </a:solidFill>
                 <a:latin typeface="Amiri" pitchFamily="2" charset="-78"/>
+                <a:ea typeface="Amiri" pitchFamily="2" charset="-78"/>
                 <a:cs typeface="Amiri" pitchFamily="2" charset="-78"/>
               </a:rPr>
               <a:t>هَلْ عِنْدَكَ حَيَوَانٌ أَلِيفٌ؟ صِفْهُ.</a:t>
@@ -24538,6 +24715,7 @@
                   <a:srgbClr val="1B3B6F"/>
                 </a:solidFill>
                 <a:latin typeface="Amiri" pitchFamily="2" charset="-78"/>
+                <a:ea typeface="Amiri" pitchFamily="2" charset="-78"/>
                 <a:cs typeface="Amiri" pitchFamily="2" charset="-78"/>
               </a:rPr>
               <a:t>لِأَنَّهَا تُرِيحُ الأَعْصَابَ، وَتُبْعِدُنَا عَنْ ضَجِيجِ المُدُنِ وَالشَّاشَاتِ.</a:t>
@@ -24614,6 +24792,7 @@
                   <a:srgbClr val="1B3B6F"/>
                 </a:solidFill>
                 <a:latin typeface="Amiri" pitchFamily="2" charset="-78"/>
+                <a:ea typeface="Amiri" pitchFamily="2" charset="-78"/>
                 <a:cs typeface="Amiri" pitchFamily="2" charset="-78"/>
               </a:rPr>
               <a:t>لِمَاذَا يُحِبُّ النَّاسُ قَضَاءَ الوَقْتِ فِي الطَّبِيعَةِ؟</a:t>
@@ -24717,6 +24896,7 @@
                   <a:srgbClr val="1B3B6F"/>
                 </a:solidFill>
                 <a:latin typeface="Amiri" pitchFamily="2" charset="-78"/>
+                <a:ea typeface="Amiri" pitchFamily="2" charset="-78"/>
                 <a:cs typeface="Amiri" pitchFamily="2" charset="-78"/>
               </a:rPr>
               <a:t>تَعِيشُ الثَّعَالِبُ وَالسَّنَاجِبُ فِي الحَدَائِقِ، وَتَعِيشُ الغِزْلَانُ فِي الغَابَاتِ الشَّمَالِيَّةِ.</a:t>
@@ -24793,6 +24973,7 @@
                   <a:srgbClr val="1B3B6F"/>
                 </a:solidFill>
                 <a:latin typeface="Amiri" pitchFamily="2" charset="-78"/>
+                <a:ea typeface="Amiri" pitchFamily="2" charset="-78"/>
                 <a:cs typeface="Amiri" pitchFamily="2" charset="-78"/>
               </a:rPr>
               <a:t>مَا الحَيَوَانَاتُ الَّتِي تَعِيشُ فِي بِلَادِكَ؟</a:t>
@@ -24896,6 +25077,7 @@
                   <a:srgbClr val="1B3B6F"/>
                 </a:solidFill>
                 <a:latin typeface="Amiri" pitchFamily="2" charset="-78"/>
+                <a:ea typeface="Amiri" pitchFamily="2" charset="-78"/>
                 <a:cs typeface="Amiri" pitchFamily="2" charset="-78"/>
               </a:rPr>
               <a:t>أُرِيدُ أَنْ أَزُورَ وَادِي رَمٍّ فِي الأُرْدُنِّ، لِأَرَى الصَّحْرَاءَ الحَمْرَاءَ وَالنُّجُومَ فِي اللَّيْلِ.</a:t>
@@ -24972,6 +25154,7 @@
                   <a:srgbClr val="1B3B6F"/>
                 </a:solidFill>
                 <a:latin typeface="Amiri" pitchFamily="2" charset="-78"/>
+                <a:ea typeface="Amiri" pitchFamily="2" charset="-78"/>
                 <a:cs typeface="Amiri" pitchFamily="2" charset="-78"/>
               </a:rPr>
               <a:t>أَيْنَ تُرِيدُ أَنْ تَذْهَبَ لِتَرَى الطَّبِيعَةَ؟</a:t>
@@ -25181,6 +25364,7 @@
                   <a:srgbClr val="D4AF37"/>
                 </a:solidFill>
                 <a:latin typeface="Amiri" pitchFamily="2" charset="-78"/>
+                <a:ea typeface="Amiri" pitchFamily="2" charset="-78"/>
                 <a:cs typeface="Amiri" pitchFamily="2" charset="-78"/>
               </a:rPr>
               <a:t>م</a:t>
@@ -25501,6 +25685,7 @@
                   <a:srgbClr val="8A6D1E"/>
                 </a:solidFill>
                 <a:latin typeface="Amiri" pitchFamily="2" charset="-78"/>
+                <a:ea typeface="Amiri" pitchFamily="2" charset="-78"/>
                 <a:cs typeface="Amiri" pitchFamily="2" charset="-78"/>
               </a:rPr>
               <a:t>نَمُوذَجُ الإِجَابَةِ</a:t>
@@ -25743,6 +25928,7 @@
                   <a:srgbClr val="1B3B6F"/>
                 </a:solidFill>
                 <a:latin typeface="Amiri" pitchFamily="2" charset="-78"/>
+                <a:ea typeface="Amiri" pitchFamily="2" charset="-78"/>
                 <a:cs typeface="Amiri" pitchFamily="2" charset="-78"/>
               </a:rPr>
               <a:t>صَحِيحٌ أَنَّ بَعْضَهَا يَحْمِي الحَيَوَانَاتِ المُهَدَّدَةَ، غَيْرَ أَنَّ الأَقْفَاصَ الصَّغِيرَةَ لَا تُنَاسِبُ حَيَوَانَاتٍ تَعِيشُ فِي مِسَاحَاتٍ وَاسِعَةٍ.</a:t>
@@ -25819,6 +26005,7 @@
                   <a:srgbClr val="1B3B6F"/>
                 </a:solidFill>
                 <a:latin typeface="Amiri" pitchFamily="2" charset="-78"/>
+                <a:ea typeface="Amiri" pitchFamily="2" charset="-78"/>
                 <a:cs typeface="Amiri" pitchFamily="2" charset="-78"/>
               </a:rPr>
               <a:t>هَلْ حَدَائِقُ الحَيَوَانِ مُفِيدَةٌ أَمْ ظَالِمَةٌ؟</a:t>
@@ -25922,6 +26109,7 @@
                   <a:srgbClr val="1B3B6F"/>
                 </a:solidFill>
                 <a:latin typeface="Amiri" pitchFamily="2" charset="-78"/>
+                <a:ea typeface="Amiri" pitchFamily="2" charset="-78"/>
                 <a:cs typeface="Amiri" pitchFamily="2" charset="-78"/>
               </a:rPr>
               <a:t>بِسَبَبِ قَطْعِ الغَابَاتِ وَالصَّيْدِ، مِمَّا يُدَمِّرُ بُيُوتَهَا الطَّبِيعِيَّةَ.</a:t>
@@ -25998,6 +26186,7 @@
                   <a:srgbClr val="1B3B6F"/>
                 </a:solidFill>
                 <a:latin typeface="Amiri" pitchFamily="2" charset="-78"/>
+                <a:ea typeface="Amiri" pitchFamily="2" charset="-78"/>
                 <a:cs typeface="Amiri" pitchFamily="2" charset="-78"/>
               </a:rPr>
               <a:t>لِمَاذَا تَخْتَفِي بَعْضُ الحَيَوَانَاتِ؟</a:t>
@@ -26101,6 +26290,7 @@
                   <a:srgbClr val="1B3B6F"/>
                 </a:solidFill>
                 <a:latin typeface="Amiri" pitchFamily="2" charset="-78"/>
+                <a:ea typeface="Amiri" pitchFamily="2" charset="-78"/>
                 <a:cs typeface="Amiri" pitchFamily="2" charset="-78"/>
               </a:rPr>
               <a:t>كَانَ هُنَاكَ حَقْلٌ كَبِيرٌ تَعِيشُ فِيهِ الأَرَانِبُ، أَمَّا الآنَ فَقَدْ بَنَوْا عَلَيْهِ مَوْقِفًا لِلسَّيَّارَاتِ.</a:t>
@@ -26177,6 +26367,7 @@
                   <a:srgbClr val="1B3B6F"/>
                 </a:solidFill>
                 <a:latin typeface="Amiri" pitchFamily="2" charset="-78"/>
+                <a:ea typeface="Amiri" pitchFamily="2" charset="-78"/>
                 <a:cs typeface="Amiri" pitchFamily="2" charset="-78"/>
               </a:rPr>
               <a:t>كَيْفَ تَغَيَّرَتِ الطَّبِيعَةُ فِي مِنْطَقَتِكَ؟</a:t>
@@ -26386,6 +26577,7 @@
                   <a:srgbClr val="D4AF37"/>
                 </a:solidFill>
                 <a:latin typeface="Amiri" pitchFamily="2" charset="-78"/>
+                <a:ea typeface="Amiri" pitchFamily="2" charset="-78"/>
                 <a:cs typeface="Amiri" pitchFamily="2" charset="-78"/>
               </a:rPr>
               <a:t>م</a:t>
@@ -26706,6 +26898,7 @@
                   <a:srgbClr val="8A6D1E"/>
                 </a:solidFill>
                 <a:latin typeface="Amiri" pitchFamily="2" charset="-78"/>
+                <a:ea typeface="Amiri" pitchFamily="2" charset="-78"/>
                 <a:cs typeface="Amiri" pitchFamily="2" charset="-78"/>
               </a:rPr>
               <a:t>نَمُوذَجُ الإِجَابَةِ</a:t>
@@ -26948,6 +27141,7 @@
                   <a:srgbClr val="1B3B6F"/>
                 </a:solidFill>
                 <a:latin typeface="Amiri" pitchFamily="2" charset="-78"/>
+                <a:ea typeface="Amiri" pitchFamily="2" charset="-78"/>
                 <a:cs typeface="Amiri" pitchFamily="2" charset="-78"/>
               </a:rPr>
               <a:t>يَسْتَطِيعُونَ أَنْ يَزْرَعُوا الأَشْجَارَ وَيُنَظِّفُوا الشَّوَاطِئَ؛ مَثَلًا زَرَعَ صَفِّي مِئَةَ شَجَرَةٍ فِي السَّنَةِ المَاضِيَةِ.</a:t>
@@ -27024,6 +27218,7 @@
                   <a:srgbClr val="1B3B6F"/>
                 </a:solidFill>
                 <a:latin typeface="Amiri" pitchFamily="2" charset="-78"/>
+                <a:ea typeface="Amiri" pitchFamily="2" charset="-78"/>
                 <a:cs typeface="Amiri" pitchFamily="2" charset="-78"/>
               </a:rPr>
               <a:t>مَا الَّذِي يَسْتَطِيعُ الشَّبَابُ أَنْ يَفْعَلُوهُ لِلطَّبِيعَةِ؟</a:t>
@@ -27127,6 +27322,7 @@
                   <a:srgbClr val="1B3B6F"/>
                 </a:solidFill>
                 <a:latin typeface="Amiri" pitchFamily="2" charset="-78"/>
+                <a:ea typeface="Amiri" pitchFamily="2" charset="-78"/>
                 <a:cs typeface="Amiri" pitchFamily="2" charset="-78"/>
               </a:rPr>
               <a:t>لَوِ اخْتَفَتِ الطُّيُورُ، لَأَصْبَحَ الصَّبَاحُ صَامِتًا وَحَزِينًا، وَلَكَثُرَتِ الحَشَرَاتُ الَّتِي تَأْكُلُهَا.</a:t>
@@ -27206,6 +27402,7 @@
                   <a:srgbClr val="1B3B6F"/>
                 </a:solidFill>
                 <a:latin typeface="Amiri" pitchFamily="2" charset="-78"/>
+                <a:ea typeface="Amiri" pitchFamily="2" charset="-78"/>
                 <a:cs typeface="Amiri" pitchFamily="2" charset="-78"/>
               </a:rPr>
               <a:t>لَوِ اخْتَفَتِ الطُّيُورُ مِنَ العَالَمِ، كَيْفَ تَكُونُ الحَيَاةُ؟</a:t>
@@ -27415,6 +27612,7 @@
                   <a:srgbClr val="D4AF37"/>
                 </a:solidFill>
                 <a:latin typeface="Amiri" pitchFamily="2" charset="-78"/>
+                <a:ea typeface="Amiri" pitchFamily="2" charset="-78"/>
                 <a:cs typeface="Amiri" pitchFamily="2" charset="-78"/>
               </a:rPr>
               <a:t>م</a:t>
@@ -27735,6 +27933,7 @@
                   <a:srgbClr val="8A6D1E"/>
                 </a:solidFill>
                 <a:latin typeface="Amiri" pitchFamily="2" charset="-78"/>
+                <a:ea typeface="Amiri" pitchFamily="2" charset="-78"/>
                 <a:cs typeface="Amiri" pitchFamily="2" charset="-78"/>
               </a:rPr>
               <a:t>قَيِّمْ عَمَلَكَ</a:t>
@@ -28979,6 +29178,7 @@
                   <a:srgbClr val="FFFFFF"/>
                 </a:solidFill>
                 <a:latin typeface="Amiri" pitchFamily="2" charset="-78"/>
+                <a:ea typeface="Amiri" pitchFamily="2" charset="-78"/>
                 <a:cs typeface="Amiri" pitchFamily="2" charset="-78"/>
               </a:rPr>
               <a:t>أَحْسَنْتُمْ! إِلَى اللِّقَاءِ</a:t>
@@ -29131,6 +29331,7 @@
                   <a:srgbClr val="D4AF37"/>
                 </a:solidFill>
                 <a:latin typeface="Amiri" pitchFamily="2" charset="-78"/>
+                <a:ea typeface="Amiri" pitchFamily="2" charset="-78"/>
                 <a:cs typeface="Amiri" pitchFamily="2" charset="-78"/>
               </a:rPr>
               <a:t>وَرْشَةُ الكِتَابَةِ</a:t>
@@ -29264,6 +29465,7 @@
                   <a:srgbClr val="D4AF37"/>
                 </a:solidFill>
                 <a:latin typeface="Amiri" pitchFamily="2" charset="-78"/>
+                <a:ea typeface="Amiri" pitchFamily="2" charset="-78"/>
                 <a:cs typeface="Amiri" pitchFamily="2" charset="-78"/>
               </a:rPr>
               <a:t>م</a:t>
@@ -29584,6 +29786,7 @@
                   <a:srgbClr val="8A6D1E"/>
                 </a:solidFill>
                 <a:latin typeface="Amiri" pitchFamily="2" charset="-78"/>
+                <a:ea typeface="Amiri" pitchFamily="2" charset="-78"/>
                 <a:cs typeface="Amiri" pitchFamily="2" charset="-78"/>
               </a:rPr>
               <a:t>خَرِيطَةُ الوَرْشَةِ</a:t>
@@ -29898,6 +30101,7 @@
                   <a:srgbClr val="1B3B6F"/>
                 </a:solidFill>
                 <a:latin typeface="Amiri" pitchFamily="2" charset="-78"/>
+                <a:ea typeface="Amiri" pitchFamily="2" charset="-78"/>
                 <a:cs typeface="Amiri" pitchFamily="2" charset="-78"/>
               </a:rPr>
               <a:t>كَيْفَ</a:t>
@@ -30174,6 +30378,7 @@
                   <a:srgbClr val="1E6B52"/>
                 </a:solidFill>
                 <a:latin typeface="Amiri" pitchFamily="2" charset="-78"/>
+                <a:ea typeface="Amiri" pitchFamily="2" charset="-78"/>
                 <a:cs typeface="Amiri" pitchFamily="2" charset="-78"/>
               </a:rPr>
               <a:t>تَمْثِيلُ الدَّوْرِ</a:t>
@@ -30450,6 +30655,7 @@
                   <a:srgbClr val="8A6D1E"/>
                 </a:solidFill>
                 <a:latin typeface="Amiri" pitchFamily="2" charset="-78"/>
+                <a:ea typeface="Amiri" pitchFamily="2" charset="-78"/>
                 <a:cs typeface="Amiri" pitchFamily="2" charset="-78"/>
               </a:rPr>
               <a:t>النَّمُوذَجُ</a:t>
@@ -30726,6 +30932,7 @@
                   <a:srgbClr val="1E6B52"/>
                 </a:solidFill>
                 <a:latin typeface="Amiri" pitchFamily="2" charset="-78"/>
+                <a:ea typeface="Amiri" pitchFamily="2" charset="-78"/>
                 <a:cs typeface="Amiri" pitchFamily="2" charset="-78"/>
               </a:rPr>
               <a:t>المُحَادَثَةُ</a:t>
@@ -31002,6 +31209,7 @@
                   <a:srgbClr val="8A6D1E"/>
                 </a:solidFill>
                 <a:latin typeface="Amiri" pitchFamily="2" charset="-78"/>
+                <a:ea typeface="Amiri" pitchFamily="2" charset="-78"/>
                 <a:cs typeface="Amiri" pitchFamily="2" charset="-78"/>
               </a:rPr>
               <a:t>قَيِّمْ</a:t>
@@ -31245,6 +31453,7 @@
                   <a:srgbClr val="D4AF37"/>
                 </a:solidFill>
                 <a:latin typeface="Amiri" pitchFamily="2" charset="-78"/>
+                <a:ea typeface="Amiri" pitchFamily="2" charset="-78"/>
                 <a:cs typeface="Amiri" pitchFamily="2" charset="-78"/>
               </a:rPr>
               <a:t>م</a:t>
@@ -31565,6 +31774,7 @@
                   <a:srgbClr val="8A6D1E"/>
                 </a:solidFill>
                 <a:latin typeface="Amiri" pitchFamily="2" charset="-78"/>
+                <a:ea typeface="Amiri" pitchFamily="2" charset="-78"/>
                 <a:cs typeface="Amiri" pitchFamily="2" charset="-78"/>
               </a:rPr>
               <a:t>امْتِحَانُ التَّحَدُّثِ</a:t>
@@ -32189,6 +32399,7 @@
                   <a:srgbClr val="1B3B6F"/>
                 </a:solidFill>
                 <a:latin typeface="Amiri" pitchFamily="2" charset="-78"/>
+                <a:ea typeface="Amiri" pitchFamily="2" charset="-78"/>
                 <a:cs typeface="Amiri" pitchFamily="2" charset="-78"/>
               </a:rPr>
               <a:t>عَفْوًا، هَلْ يُمْكِنُ أَنْ تُعِيدَ السُّؤَالَ؟</a:t>
@@ -32288,6 +32499,7 @@
                   <a:srgbClr val="1B3B6F"/>
                 </a:solidFill>
                 <a:latin typeface="Amiri" pitchFamily="2" charset="-78"/>
+                <a:ea typeface="Amiri" pitchFamily="2" charset="-78"/>
                 <a:cs typeface="Amiri" pitchFamily="2" charset="-78"/>
               </a:rPr>
               <a:t>لَحْظَةً، دَعْنِي أُفَكِّرُ …</a:t>
@@ -32387,6 +32599,7 @@
                   <a:srgbClr val="1B3B6F"/>
                 </a:solidFill>
                 <a:latin typeface="Amiri" pitchFamily="2" charset="-78"/>
+                <a:ea typeface="Amiri" pitchFamily="2" charset="-78"/>
                 <a:cs typeface="Amiri" pitchFamily="2" charset="-78"/>
               </a:rPr>
               <a:t>أَقْصِدُ …</a:t>
@@ -32558,6 +32771,7 @@
                   <a:srgbClr val="D4AF37"/>
                 </a:solidFill>
                 <a:latin typeface="Amiri" pitchFamily="2" charset="-78"/>
+                <a:ea typeface="Amiri" pitchFamily="2" charset="-78"/>
                 <a:cs typeface="Amiri" pitchFamily="2" charset="-78"/>
               </a:rPr>
               <a:t>م</a:t>
@@ -32878,6 +33092,7 @@
                   <a:srgbClr val="8A6D1E"/>
                 </a:solidFill>
                 <a:latin typeface="Amiri" pitchFamily="2" charset="-78"/>
+                <a:ea typeface="Amiri" pitchFamily="2" charset="-78"/>
                 <a:cs typeface="Amiri" pitchFamily="2" charset="-78"/>
               </a:rPr>
               <a:t>المَنَاظِرُ الطَّبِيعِيَّةُ</a:t>
@@ -33181,6 +33396,7 @@
                   <a:srgbClr val="1B3B6F"/>
                 </a:solidFill>
                 <a:latin typeface="Amiri" pitchFamily="2" charset="-78"/>
+                <a:ea typeface="Amiri" pitchFamily="2" charset="-78"/>
                 <a:cs typeface="Amiri" pitchFamily="2" charset="-78"/>
               </a:rPr>
               <a:t>جَبَلٌ</a:t>
@@ -33338,6 +33554,7 @@
                   <a:srgbClr val="1B3B6F"/>
                 </a:solidFill>
                 <a:latin typeface="Amiri" pitchFamily="2" charset="-78"/>
+                <a:ea typeface="Amiri" pitchFamily="2" charset="-78"/>
                 <a:cs typeface="Amiri" pitchFamily="2" charset="-78"/>
               </a:rPr>
               <a:t>جِبَالٌ عَالِيَةٌ</a:t>
@@ -33441,6 +33658,7 @@
                   <a:srgbClr val="1B3B6F"/>
                 </a:solidFill>
                 <a:latin typeface="Amiri" pitchFamily="2" charset="-78"/>
+                <a:ea typeface="Amiri" pitchFamily="2" charset="-78"/>
                 <a:cs typeface="Amiri" pitchFamily="2" charset="-78"/>
               </a:rPr>
               <a:t>جِبَالٌ</a:t>
@@ -33544,6 +33762,7 @@
                   <a:srgbClr val="1B3B6F"/>
                 </a:solidFill>
                 <a:latin typeface="Amiri" pitchFamily="2" charset="-78"/>
+                <a:ea typeface="Amiri" pitchFamily="2" charset="-78"/>
                 <a:cs typeface="Amiri" pitchFamily="2" charset="-78"/>
               </a:rPr>
               <a:t>جَبَلٌ</a:t>
@@ -33809,6 +34028,7 @@
                   <a:srgbClr val="1B3B6F"/>
                 </a:solidFill>
                 <a:latin typeface="Amiri" pitchFamily="2" charset="-78"/>
+                <a:ea typeface="Amiri" pitchFamily="2" charset="-78"/>
                 <a:cs typeface="Amiri" pitchFamily="2" charset="-78"/>
               </a:rPr>
               <a:t>صَحْرَاءُ</a:t>
@@ -33966,6 +34186,7 @@
                   <a:srgbClr val="1B3B6F"/>
                 </a:solidFill>
                 <a:latin typeface="Amiri" pitchFamily="2" charset="-78"/>
+                <a:ea typeface="Amiri" pitchFamily="2" charset="-78"/>
                 <a:cs typeface="Amiri" pitchFamily="2" charset="-78"/>
               </a:rPr>
               <a:t>صَحْرَاءُ وَاسِعَةٌ</a:t>
@@ -34069,6 +34290,7 @@
                   <a:srgbClr val="1B3B6F"/>
                 </a:solidFill>
                 <a:latin typeface="Amiri" pitchFamily="2" charset="-78"/>
+                <a:ea typeface="Amiri" pitchFamily="2" charset="-78"/>
                 <a:cs typeface="Amiri" pitchFamily="2" charset="-78"/>
               </a:rPr>
               <a:t>صَحَارٍ</a:t>
@@ -34172,6 +34394,7 @@
                   <a:srgbClr val="1B3B6F"/>
                 </a:solidFill>
                 <a:latin typeface="Amiri" pitchFamily="2" charset="-78"/>
+                <a:ea typeface="Amiri" pitchFamily="2" charset="-78"/>
                 <a:cs typeface="Amiri" pitchFamily="2" charset="-78"/>
               </a:rPr>
               <a:t>صَحْرَاءُ</a:t>
@@ -34437,6 +34660,7 @@
                   <a:srgbClr val="1B3B6F"/>
                 </a:solidFill>
                 <a:latin typeface="Amiri" pitchFamily="2" charset="-78"/>
+                <a:ea typeface="Amiri" pitchFamily="2" charset="-78"/>
                 <a:cs typeface="Amiri" pitchFamily="2" charset="-78"/>
               </a:rPr>
               <a:t>غَابَةٌ</a:t>
@@ -34594,6 +34818,7 @@
                   <a:srgbClr val="1B3B6F"/>
                 </a:solidFill>
                 <a:latin typeface="Amiri" pitchFamily="2" charset="-78"/>
+                <a:ea typeface="Amiri" pitchFamily="2" charset="-78"/>
                 <a:cs typeface="Amiri" pitchFamily="2" charset="-78"/>
               </a:rPr>
               <a:t>غَابَةٌ اسْتِوَائِيَّةٌ</a:t>
@@ -34697,6 +34922,7 @@
                   <a:srgbClr val="1B3B6F"/>
                 </a:solidFill>
                 <a:latin typeface="Amiri" pitchFamily="2" charset="-78"/>
+                <a:ea typeface="Amiri" pitchFamily="2" charset="-78"/>
                 <a:cs typeface="Amiri" pitchFamily="2" charset="-78"/>
               </a:rPr>
               <a:t>غَابَاتٌ</a:t>
@@ -34800,6 +35026,7 @@
                   <a:srgbClr val="1B3B6F"/>
                 </a:solidFill>
                 <a:latin typeface="Amiri" pitchFamily="2" charset="-78"/>
+                <a:ea typeface="Amiri" pitchFamily="2" charset="-78"/>
                 <a:cs typeface="Amiri" pitchFamily="2" charset="-78"/>
               </a:rPr>
               <a:t>غَابَةٌ</a:t>
@@ -35065,6 +35292,7 @@
                   <a:srgbClr val="1B3B6F"/>
                 </a:solidFill>
                 <a:latin typeface="Amiri" pitchFamily="2" charset="-78"/>
+                <a:ea typeface="Amiri" pitchFamily="2" charset="-78"/>
                 <a:cs typeface="Amiri" pitchFamily="2" charset="-78"/>
               </a:rPr>
               <a:t>نَهْرٌ · بُحَيْرَةٌ</a:t>
@@ -35222,6 +35450,7 @@
                   <a:srgbClr val="1B3B6F"/>
                 </a:solidFill>
                 <a:latin typeface="Amiri" pitchFamily="2" charset="-78"/>
+                <a:ea typeface="Amiri" pitchFamily="2" charset="-78"/>
                 <a:cs typeface="Amiri" pitchFamily="2" charset="-78"/>
               </a:rPr>
               <a:t>أَنْهَارٌ · بُحَيْرَاتٌ</a:t>
@@ -35487,6 +35716,7 @@
                   <a:srgbClr val="1B3B6F"/>
                 </a:solidFill>
                 <a:latin typeface="Amiri" pitchFamily="2" charset="-78"/>
+                <a:ea typeface="Amiri" pitchFamily="2" charset="-78"/>
                 <a:cs typeface="Amiri" pitchFamily="2" charset="-78"/>
               </a:rPr>
               <a:t>وَادٍ</a:t>
@@ -35644,6 +35874,7 @@
                   <a:srgbClr val="1B3B6F"/>
                 </a:solidFill>
                 <a:latin typeface="Amiri" pitchFamily="2" charset="-78"/>
+                <a:ea typeface="Amiri" pitchFamily="2" charset="-78"/>
                 <a:cs typeface="Amiri" pitchFamily="2" charset="-78"/>
               </a:rPr>
               <a:t>وِدْيَانٌ</a:t>
@@ -35747,6 +35978,7 @@
                   <a:srgbClr val="1B3B6F"/>
                 </a:solidFill>
                 <a:latin typeface="Amiri" pitchFamily="2" charset="-78"/>
+                <a:ea typeface="Amiri" pitchFamily="2" charset="-78"/>
                 <a:cs typeface="Amiri" pitchFamily="2" charset="-78"/>
               </a:rPr>
               <a:t>الوَادِي</a:t>
@@ -36012,6 +36244,7 @@
                   <a:srgbClr val="1B3B6F"/>
                 </a:solidFill>
                 <a:latin typeface="Amiri" pitchFamily="2" charset="-78"/>
+                <a:ea typeface="Amiri" pitchFamily="2" charset="-78"/>
                 <a:cs typeface="Amiri" pitchFamily="2" charset="-78"/>
               </a:rPr>
               <a:t>شَاطِئٌ · سَاحِلٌ</a:t>
@@ -36169,6 +36402,7 @@
                   <a:srgbClr val="1B3B6F"/>
                 </a:solidFill>
                 <a:latin typeface="Amiri" pitchFamily="2" charset="-78"/>
+                <a:ea typeface="Amiri" pitchFamily="2" charset="-78"/>
                 <a:cs typeface="Amiri" pitchFamily="2" charset="-78"/>
               </a:rPr>
               <a:t>شَوَاطِئُ · سَوَاحِلُ</a:t>
@@ -36302,6 +36536,7 @@
                   <a:srgbClr val="D4AF37"/>
                 </a:solidFill>
                 <a:latin typeface="Amiri" pitchFamily="2" charset="-78"/>
+                <a:ea typeface="Amiri" pitchFamily="2" charset="-78"/>
                 <a:cs typeface="Amiri" pitchFamily="2" charset="-78"/>
               </a:rPr>
               <a:t>م</a:t>
@@ -36622,6 +36857,7 @@
                   <a:srgbClr val="8A6D1E"/>
                 </a:solidFill>
                 <a:latin typeface="Amiri" pitchFamily="2" charset="-78"/>
+                <a:ea typeface="Amiri" pitchFamily="2" charset="-78"/>
                 <a:cs typeface="Amiri" pitchFamily="2" charset="-78"/>
               </a:rPr>
               <a:t>أَيْنَ تَعِيشُ الحَيَوَانَاتُ؟</a:t>
@@ -36925,6 +37161,7 @@
                   <a:srgbClr val="1B3B6F"/>
                 </a:solidFill>
                 <a:latin typeface="Amiri" pitchFamily="2" charset="-78"/>
+                <a:ea typeface="Amiri" pitchFamily="2" charset="-78"/>
                 <a:cs typeface="Amiri" pitchFamily="2" charset="-78"/>
               </a:rPr>
               <a:t>حَيَوَانٌ</a:t>
@@ -37082,6 +37319,7 @@
                   <a:srgbClr val="1B3B6F"/>
                 </a:solidFill>
                 <a:latin typeface="Amiri" pitchFamily="2" charset="-78"/>
+                <a:ea typeface="Amiri" pitchFamily="2" charset="-78"/>
                 <a:cs typeface="Amiri" pitchFamily="2" charset="-78"/>
               </a:rPr>
               <a:t>حَيَوَانَاتٌ بَرِّيَّةٌ</a:t>
@@ -37185,6 +37423,7 @@
                   <a:srgbClr val="1B3B6F"/>
                 </a:solidFill>
                 <a:latin typeface="Amiri" pitchFamily="2" charset="-78"/>
+                <a:ea typeface="Amiri" pitchFamily="2" charset="-78"/>
                 <a:cs typeface="Amiri" pitchFamily="2" charset="-78"/>
               </a:rPr>
               <a:t>حَيَوَانَاتٌ</a:t>
@@ -37288,6 +37527,7 @@
                   <a:srgbClr val="1B3B6F"/>
                 </a:solidFill>
                 <a:latin typeface="Amiri" pitchFamily="2" charset="-78"/>
+                <a:ea typeface="Amiri" pitchFamily="2" charset="-78"/>
                 <a:cs typeface="Amiri" pitchFamily="2" charset="-78"/>
               </a:rPr>
               <a:t>حَيَوَانٌ</a:t>
@@ -37553,6 +37793,7 @@
                   <a:srgbClr val="1B3B6F"/>
                 </a:solidFill>
                 <a:latin typeface="Amiri" pitchFamily="2" charset="-78"/>
+                <a:ea typeface="Amiri" pitchFamily="2" charset="-78"/>
                 <a:cs typeface="Amiri" pitchFamily="2" charset="-78"/>
               </a:rPr>
               <a:t>طَائِرٌ</a:t>
@@ -37710,6 +37951,7 @@
                   <a:srgbClr val="1B3B6F"/>
                 </a:solidFill>
                 <a:latin typeface="Amiri" pitchFamily="2" charset="-78"/>
+                <a:ea typeface="Amiri" pitchFamily="2" charset="-78"/>
                 <a:cs typeface="Amiri" pitchFamily="2" charset="-78"/>
               </a:rPr>
               <a:t>طُيُورٌ نَادِرَةٌ</a:t>
@@ -37813,6 +38055,7 @@
                   <a:srgbClr val="1B3B6F"/>
                 </a:solidFill>
                 <a:latin typeface="Amiri" pitchFamily="2" charset="-78"/>
+                <a:ea typeface="Amiri" pitchFamily="2" charset="-78"/>
                 <a:cs typeface="Amiri" pitchFamily="2" charset="-78"/>
               </a:rPr>
               <a:t>طُيُورٌ</a:t>
@@ -37916,6 +38159,7 @@
                   <a:srgbClr val="1B3B6F"/>
                 </a:solidFill>
                 <a:latin typeface="Amiri" pitchFamily="2" charset="-78"/>
+                <a:ea typeface="Amiri" pitchFamily="2" charset="-78"/>
                 <a:cs typeface="Amiri" pitchFamily="2" charset="-78"/>
               </a:rPr>
               <a:t>طَائِرٌ</a:t>
@@ -38181,6 +38425,7 @@
                   <a:srgbClr val="1B3B6F"/>
                 </a:solidFill>
                 <a:latin typeface="Amiri" pitchFamily="2" charset="-78"/>
+                <a:ea typeface="Amiri" pitchFamily="2" charset="-78"/>
                 <a:cs typeface="Amiri" pitchFamily="2" charset="-78"/>
               </a:rPr>
               <a:t>يَعِيشُ فِي …</a:t>
@@ -38338,6 +38583,7 @@
                   <a:srgbClr val="1B3B6F"/>
                 </a:solidFill>
                 <a:latin typeface="Amiri" pitchFamily="2" charset="-78"/>
+                <a:ea typeface="Amiri" pitchFamily="2" charset="-78"/>
                 <a:cs typeface="Amiri" pitchFamily="2" charset="-78"/>
               </a:rPr>
               <a:t>يَعِيشُونَ</a:t>
@@ -38441,6 +38687,7 @@
                   <a:srgbClr val="1B3B6F"/>
                 </a:solidFill>
                 <a:latin typeface="Amiri" pitchFamily="2" charset="-78"/>
+                <a:ea typeface="Amiri" pitchFamily="2" charset="-78"/>
                 <a:cs typeface="Amiri" pitchFamily="2" charset="-78"/>
               </a:rPr>
               <a:t>تَعِيشُ</a:t>
@@ -38706,6 +38953,7 @@
                   <a:srgbClr val="1B3B6F"/>
                 </a:solidFill>
                 <a:latin typeface="Amiri" pitchFamily="2" charset="-78"/>
+                <a:ea typeface="Amiri" pitchFamily="2" charset="-78"/>
                 <a:cs typeface="Amiri" pitchFamily="2" charset="-78"/>
               </a:rPr>
               <a:t>جَمِيلٌ · خَلَّابٌ</a:t>
@@ -38863,6 +39111,7 @@
                   <a:srgbClr val="1B3B6F"/>
                 </a:solidFill>
                 <a:latin typeface="Amiri" pitchFamily="2" charset="-78"/>
+                <a:ea typeface="Amiri" pitchFamily="2" charset="-78"/>
                 <a:cs typeface="Amiri" pitchFamily="2" charset="-78"/>
               </a:rPr>
               <a:t>جَمِيلَةٌ · خَلَّابَةٌ</a:t>
@@ -39128,6 +39377,7 @@
                   <a:srgbClr val="1B3B6F"/>
                 </a:solidFill>
                 <a:latin typeface="Amiri" pitchFamily="2" charset="-78"/>
+                <a:ea typeface="Amiri" pitchFamily="2" charset="-78"/>
                 <a:cs typeface="Amiri" pitchFamily="2" charset="-78"/>
               </a:rPr>
               <a:t>نَادِرٌ · مُهَدَّدٌ</a:t>
@@ -39285,6 +39535,7 @@
                   <a:srgbClr val="1B3B6F"/>
                 </a:solidFill>
                 <a:latin typeface="Amiri" pitchFamily="2" charset="-78"/>
+                <a:ea typeface="Amiri" pitchFamily="2" charset="-78"/>
                 <a:cs typeface="Amiri" pitchFamily="2" charset="-78"/>
               </a:rPr>
               <a:t>مُهَدَّدٌ بِالانْقِرَاضِ</a:t>
@@ -39388,6 +39639,7 @@
                   <a:srgbClr val="1B3B6F"/>
                 </a:solidFill>
                 <a:latin typeface="Amiri" pitchFamily="2" charset="-78"/>
+                <a:ea typeface="Amiri" pitchFamily="2" charset="-78"/>
                 <a:cs typeface="Amiri" pitchFamily="2" charset="-78"/>
               </a:rPr>
               <a:t>نَادِرَةٌ · مُهَدَّدَةٌ</a:t>
@@ -39653,6 +39905,7 @@
                   <a:srgbClr val="1B3B6F"/>
                 </a:solidFill>
                 <a:latin typeface="Amiri" pitchFamily="2" charset="-78"/>
+                <a:ea typeface="Amiri" pitchFamily="2" charset="-78"/>
                 <a:cs typeface="Amiri" pitchFamily="2" charset="-78"/>
               </a:rPr>
               <a:t>نِظَامٌ بِيئِيٌّ</a:t>
@@ -39810,6 +40063,7 @@
                   <a:srgbClr val="1B3B6F"/>
                 </a:solidFill>
                 <a:latin typeface="Amiri" pitchFamily="2" charset="-78"/>
+                <a:ea typeface="Amiri" pitchFamily="2" charset="-78"/>
                 <a:cs typeface="Amiri" pitchFamily="2" charset="-78"/>
               </a:rPr>
               <a:t>البِيئَةُ</a:t>
@@ -39913,6 +40167,7 @@
                   <a:srgbClr val="1B3B6F"/>
                 </a:solidFill>
                 <a:latin typeface="Amiri" pitchFamily="2" charset="-78"/>
+                <a:ea typeface="Amiri" pitchFamily="2" charset="-78"/>
                 <a:cs typeface="Amiri" pitchFamily="2" charset="-78"/>
               </a:rPr>
               <a:t>أَنْظِمَةٌ بِيئِيَّةٌ</a:t>
@@ -40046,6 +40301,7 @@
                   <a:srgbClr val="D4AF37"/>
                 </a:solidFill>
                 <a:latin typeface="Amiri" pitchFamily="2" charset="-78"/>
+                <a:ea typeface="Amiri" pitchFamily="2" charset="-78"/>
                 <a:cs typeface="Amiri" pitchFamily="2" charset="-78"/>
               </a:rPr>
               <a:t>م</a:t>
@@ -40366,6 +40622,7 @@
                   <a:srgbClr val="8A6D1E"/>
                 </a:solidFill>
                 <a:latin typeface="Amiri" pitchFamily="2" charset="-78"/>
+                <a:ea typeface="Amiri" pitchFamily="2" charset="-78"/>
                 <a:cs typeface="Amiri" pitchFamily="2" charset="-78"/>
               </a:rPr>
               <a:t>فِي الغُرَفِ</a:t>
@@ -41542,6 +41799,7 @@
                   <a:srgbClr val="1B3B6F"/>
                 </a:solidFill>
                 <a:latin typeface="Amiri" pitchFamily="2" charset="-78"/>
+                <a:ea typeface="Amiri" pitchFamily="2" charset="-78"/>
                 <a:cs typeface="Amiri" pitchFamily="2" charset="-78"/>
               </a:rPr>
               <a:t>دَوْرُكَ!</a:t>
@@ -41618,6 +41876,7 @@
                   <a:srgbClr val="1B3B6F"/>
                 </a:solidFill>
                 <a:latin typeface="Amiri" pitchFamily="2" charset="-78"/>
+                <a:ea typeface="Amiri" pitchFamily="2" charset="-78"/>
                 <a:cs typeface="Amiri" pitchFamily="2" charset="-78"/>
               </a:rPr>
               <a:t>أَحْسَنْتَ! / أَحْسَنْتِ!</a:t>
@@ -41694,6 +41953,7 @@
                   <a:srgbClr val="1B3B6F"/>
                 </a:solidFill>
                 <a:latin typeface="Amiri" pitchFamily="2" charset="-78"/>
+                <a:ea typeface="Amiri" pitchFamily="2" charset="-78"/>
                 <a:cs typeface="Amiri" pitchFamily="2" charset="-78"/>
               </a:rPr>
               <a:t>تَكَلَّمْ أَكْثَرَ، مِنْ فَضْلِكَ</a:t>
@@ -41770,6 +42030,7 @@
                   <a:srgbClr val="1B3B6F"/>
                 </a:solidFill>
                 <a:latin typeface="Amiri" pitchFamily="2" charset="-78"/>
+                <a:ea typeface="Amiri" pitchFamily="2" charset="-78"/>
                 <a:cs typeface="Amiri" pitchFamily="2" charset="-78"/>
               </a:rPr>
               <a:t>لِمَاذَا؟</a:t>
@@ -41941,6 +42202,7 @@
                   <a:srgbClr val="D4AF37"/>
                 </a:solidFill>
                 <a:latin typeface="Amiri" pitchFamily="2" charset="-78"/>
+                <a:ea typeface="Amiri" pitchFamily="2" charset="-78"/>
                 <a:cs typeface="Amiri" pitchFamily="2" charset="-78"/>
               </a:rPr>
               <a:t>م</a:t>
@@ -42261,6 +42523,7 @@
                   <a:srgbClr val="8A6D1E"/>
                 </a:solidFill>
                 <a:latin typeface="Amiri" pitchFamily="2" charset="-78"/>
+                <a:ea typeface="Amiri" pitchFamily="2" charset="-78"/>
                 <a:cs typeface="Amiri" pitchFamily="2" charset="-78"/>
               </a:rPr>
               <a:t>فِي الحَدِيقَةِ الوَطَنِيَّةِ</a:t>
@@ -42541,6 +42804,7 @@
                   <a:srgbClr val="1B3B6F"/>
                 </a:solidFill>
                 <a:latin typeface="Amiri" pitchFamily="2" charset="-78"/>
+                <a:ea typeface="Amiri" pitchFamily="2" charset="-78"/>
                 <a:cs typeface="Amiri" pitchFamily="2" charset="-78"/>
               </a:rPr>
               <a:t>أُرِيدُ أَنْ أَرَى …</a:t>
@@ -42617,6 +42881,7 @@
                   <a:srgbClr val="1B3B6F"/>
                 </a:solidFill>
                 <a:latin typeface="Amiri" pitchFamily="2" charset="-78"/>
+                <a:ea typeface="Amiri" pitchFamily="2" charset="-78"/>
                 <a:cs typeface="Amiri" pitchFamily="2" charset="-78"/>
               </a:rPr>
               <a:t>أَهْلًا! مَاذَا تُرِيدُ أَنْ تَرَى؟</a:t>
@@ -42785,6 +43050,7 @@
                   <a:srgbClr val="1B3B6F"/>
                 </a:solidFill>
                 <a:latin typeface="Amiri" pitchFamily="2" charset="-78"/>
+                <a:ea typeface="Amiri" pitchFamily="2" charset="-78"/>
                 <a:cs typeface="Amiri" pitchFamily="2" charset="-78"/>
               </a:rPr>
               <a:t>نَعَمْ، أُحِبُّ … لِأَنَّ …</a:t>
@@ -42861,6 +43127,7 @@
                   <a:srgbClr val="1B3B6F"/>
                 </a:solidFill>
                 <a:latin typeface="Amiri" pitchFamily="2" charset="-78"/>
+                <a:ea typeface="Amiri" pitchFamily="2" charset="-78"/>
                 <a:cs typeface="Amiri" pitchFamily="2" charset="-78"/>
               </a:rPr>
               <a:t>هَلْ تُحِبُّ الطَّبِيعَةَ؟</a:t>
@@ -43029,6 +43296,7 @@
                   <a:srgbClr val="1B3B6F"/>
                 </a:solidFill>
                 <a:latin typeface="Amiri" pitchFamily="2" charset="-78"/>
+                <a:ea typeface="Amiri" pitchFamily="2" charset="-78"/>
                 <a:cs typeface="Amiri" pitchFamily="2" charset="-78"/>
               </a:rPr>
               <a:t>أُرِيدُ أَنْ أَرَى … وَ…</a:t>
@@ -43105,6 +43373,7 @@
                   <a:srgbClr val="1B3B6F"/>
                 </a:solidFill>
                 <a:latin typeface="Amiri" pitchFamily="2" charset="-78"/>
+                <a:ea typeface="Amiri" pitchFamily="2" charset="-78"/>
                 <a:cs typeface="Amiri" pitchFamily="2" charset="-78"/>
               </a:rPr>
               <a:t>أَيَّ حَيَوَانَاتٍ تُرِيدُ أَنْ تَرَى؟</a:t>
@@ -43273,6 +43542,7 @@
                   <a:srgbClr val="1B3B6F"/>
                 </a:solidFill>
                 <a:latin typeface="Amiri" pitchFamily="2" charset="-78"/>
+                <a:ea typeface="Amiri" pitchFamily="2" charset="-78"/>
                 <a:cs typeface="Amiri" pitchFamily="2" charset="-78"/>
               </a:rPr>
               <a:t>كَمْ سَاعَةً …؟</a:t>
@@ -43349,6 +43619,7 @@
                   <a:srgbClr val="1B3B6F"/>
                 </a:solidFill>
                 <a:latin typeface="Amiri" pitchFamily="2" charset="-78"/>
+                <a:ea typeface="Amiri" pitchFamily="2" charset="-78"/>
                 <a:cs typeface="Amiri" pitchFamily="2" charset="-78"/>
               </a:rPr>
               <a:t>الطَّرِيقُ إِلَى البُحَيْرَةِ طَوِيلٌ.</a:t>
@@ -43517,6 +43788,7 @@
                   <a:srgbClr val="1B3B6F"/>
                 </a:solidFill>
                 <a:latin typeface="Amiri" pitchFamily="2" charset="-78"/>
+                <a:ea typeface="Amiri" pitchFamily="2" charset="-78"/>
                 <a:cs typeface="Amiri" pitchFamily="2" charset="-78"/>
               </a:rPr>
               <a:t>نَعَمْ، عِنْدِي … / لَا، …</a:t>
@@ -43593,6 +43865,7 @@
                   <a:srgbClr val="1B3B6F"/>
                 </a:solidFill>
                 <a:latin typeface="Amiri" pitchFamily="2" charset="-78"/>
+                <a:ea typeface="Amiri" pitchFamily="2" charset="-78"/>
                 <a:cs typeface="Amiri" pitchFamily="2" charset="-78"/>
               </a:rPr>
               <a:t>هَلْ عِنْدَكَ مَاءٌ وَحِذَاءٌ مُنَاسِبٌ؟</a:t>
@@ -43867,6 +44140,7 @@
                   <a:srgbClr val="D4AF37"/>
                 </a:solidFill>
                 <a:latin typeface="Amiri" pitchFamily="2" charset="-78"/>
+                <a:ea typeface="Amiri" pitchFamily="2" charset="-78"/>
                 <a:cs typeface="Amiri" pitchFamily="2" charset="-78"/>
               </a:rPr>
               <a:t>م</a:t>
@@ -44187,6 +44461,7 @@
                   <a:srgbClr val="8A6D1E"/>
                 </a:solidFill>
                 <a:latin typeface="Amiri" pitchFamily="2" charset="-78"/>
+                <a:ea typeface="Amiri" pitchFamily="2" charset="-78"/>
                 <a:cs typeface="Amiri" pitchFamily="2" charset="-78"/>
               </a:rPr>
               <a:t>الصَّحْرَاءُ أَمِ الغَابَةُ؟</a:t>
@@ -44467,6 +44742,7 @@
                   <a:srgbClr val="1B3B6F"/>
                 </a:solidFill>
                 <a:latin typeface="Amiri" pitchFamily="2" charset="-78"/>
+                <a:ea typeface="Amiri" pitchFamily="2" charset="-78"/>
                 <a:cs typeface="Amiri" pitchFamily="2" charset="-78"/>
               </a:rPr>
               <a:t>أُفَضِّلُ … لِأَنَّ …</a:t>
@@ -44543,6 +44819,7 @@
                   <a:srgbClr val="1B3B6F"/>
                 </a:solidFill>
                 <a:latin typeface="Amiri" pitchFamily="2" charset="-78"/>
+                <a:ea typeface="Amiri" pitchFamily="2" charset="-78"/>
                 <a:cs typeface="Amiri" pitchFamily="2" charset="-78"/>
               </a:rPr>
               <a:t>أَيْنَ نَذْهَبُ: إِلَى الصَّحْرَاءِ أَمْ إِلَى الغَابَةِ؟</a:t>
@@ -44711,6 +44988,7 @@
                   <a:srgbClr val="1B3B6F"/>
                 </a:solidFill>
                 <a:latin typeface="Amiri" pitchFamily="2" charset="-78"/>
+                <a:ea typeface="Amiri" pitchFamily="2" charset="-78"/>
                 <a:cs typeface="Amiri" pitchFamily="2" charset="-78"/>
               </a:rPr>
               <a:t>سَنَرَى … وَ…</a:t>
@@ -44787,6 +45065,7 @@
                   <a:srgbClr val="1B3B6F"/>
                 </a:solidFill>
                 <a:latin typeface="Amiri" pitchFamily="2" charset="-78"/>
+                <a:ea typeface="Amiri" pitchFamily="2" charset="-78"/>
                 <a:cs typeface="Amiri" pitchFamily="2" charset="-78"/>
               </a:rPr>
               <a:t>وَمَاذَا نَرَى هُنَاكَ؟</a:t>
@@ -44955,6 +45234,7 @@
                   <a:srgbClr val="1B3B6F"/>
                 </a:solidFill>
                 <a:latin typeface="Amiri" pitchFamily="2" charset="-78"/>
+                <a:ea typeface="Amiri" pitchFamily="2" charset="-78"/>
                 <a:cs typeface="Amiri" pitchFamily="2" charset="-78"/>
               </a:rPr>
               <a:t>مَتَى …؟</a:t>
@@ -45031,6 +45311,7 @@
                   <a:srgbClr val="1B3B6F"/>
                 </a:solidFill>
                 <a:latin typeface="Amiri" pitchFamily="2" charset="-78"/>
+                <a:ea typeface="Amiri" pitchFamily="2" charset="-78"/>
                 <a:cs typeface="Amiri" pitchFamily="2" charset="-78"/>
               </a:rPr>
               <a:t>… لٰكِنَّ الصَّحْرَاءَ حَارَّةٌ جِدًّا!</a:t>
@@ -45134,6 +45415,7 @@
                   <a:srgbClr val="1B3B6F"/>
                 </a:solidFill>
                 <a:latin typeface="Amiri" pitchFamily="2" charset="-78"/>
+                <a:ea typeface="Amiri" pitchFamily="2" charset="-78"/>
                 <a:cs typeface="Amiri" pitchFamily="2" charset="-78"/>
               </a:rPr>
               <a:t>الصَّحْرَاءُ أَجْمَلُ مِنَ الغَابَةِ … لٰكِنَّ …</a:t>
@@ -45210,6 +45492,7 @@
                   <a:srgbClr val="1B3B6F"/>
                 </a:solidFill>
                 <a:latin typeface="Amiri" pitchFamily="2" charset="-78"/>
+                <a:ea typeface="Amiri" pitchFamily="2" charset="-78"/>
                 <a:cs typeface="Amiri" pitchFamily="2" charset="-78"/>
               </a:rPr>
               <a:t>فِي الشِّتَاءِ. وَفِي اللَّيْلِ يَكُونُ الجَوُّ بَارِدًا.</a:t>
@@ -45313,6 +45596,7 @@
                   <a:srgbClr val="1B3B6F"/>
                 </a:solidFill>
                 <a:latin typeface="Amiri" pitchFamily="2" charset="-78"/>
+                <a:ea typeface="Amiri" pitchFamily="2" charset="-78"/>
                 <a:cs typeface="Amiri" pitchFamily="2" charset="-78"/>
               </a:rPr>
               <a:t>يَعِيشُ … لِأَنَّهُ …</a:t>
@@ -45389,6 +45673,7 @@
                   <a:srgbClr val="1B3B6F"/>
                 </a:solidFill>
                 <a:latin typeface="Amiri" pitchFamily="2" charset="-78"/>
+                <a:ea typeface="Amiri" pitchFamily="2" charset="-78"/>
                 <a:cs typeface="Amiri" pitchFamily="2" charset="-78"/>
               </a:rPr>
               <a:t>مَا الحَيَوَانُ الَّذِي يَعِيشُ فِي الصَّحْرَاءِ؟</a:t>
@@ -45563,13 +45848,9 @@
     <a:fontScheme name="Office">
       <a:majorFont>
         <a:latin typeface="Calibri Light" panose="020F0302020204030204"/>
-        <a:ea typeface=""/>
-        <a:cs typeface=""/>
-        <a:font script="Jpan" typeface="游ゴシック Light"/>
-        <a:font script="Hang" typeface="맑은 고딕"/>
-        <a:font script="Hans" typeface="等线 Light"/>
-        <a:font script="Hant" typeface="新細明體"/>
-        <a:font script="Arab" typeface="Times New Roman"/>
+        <a:ea typeface="Amiri" pitchFamily="2" charset="-78"/>
+        <a:cs typeface="Amiri" pitchFamily="2" charset="-78"/>
+        <a:font script="Arab" typeface="Amiri"/>
         <a:font script="Hebr" typeface="Times New Roman"/>
         <a:font script="Thai" typeface="Angsana New"/>
         <a:font script="Ethi" typeface="Nyala"/>
@@ -45615,13 +45896,9 @@
       </a:majorFont>
       <a:minorFont>
         <a:latin typeface="Calibri" panose="020F0502020204030204"/>
-        <a:ea typeface=""/>
-        <a:cs typeface=""/>
-        <a:font script="Jpan" typeface="游ゴシック"/>
-        <a:font script="Hang" typeface="맑은 고딕"/>
-        <a:font script="Hans" typeface="等线"/>
-        <a:font script="Hant" typeface="新細明體"/>
-        <a:font script="Arab" typeface="Arial"/>
+        <a:ea typeface="Amiri" pitchFamily="2" charset="-78"/>
+        <a:cs typeface="Amiri" pitchFamily="2" charset="-78"/>
+        <a:font script="Arab" typeface="Amiri"/>
         <a:font script="Hebr" typeface="Arial"/>
         <a:font script="Thai" typeface="Cordia New"/>
         <a:font script="Ethi" typeface="Nyala"/>
